--- a/deliverables/中东华人共创共享联盟_战略与落地执行.pptx
+++ b/deliverables/中东华人共创共享联盟_战略与落地执行.pptx
@@ -8001,8 +8001,8 @@
         </p:nvSpPr>
         <p:spPr>
           <a:xfrm>
-            <a:off x="365760" y="1325880"/>
-            <a:ext cx="-54862" cy="438912"/>
+            <a:off x="320040" y="1298448"/>
+            <a:ext cx="1773936" cy="475488"/>
           </a:xfrm>
           <a:prstGeom prst="roundRect">
             <a:avLst>
@@ -8047,8 +8047,8 @@
         </p:nvSpPr>
         <p:spPr>
           <a:xfrm>
-            <a:off x="438912" y="1389888"/>
-            <a:ext cx="-182878" cy="320040"/>
+            <a:off x="393192" y="1298448"/>
+            <a:ext cx="1664208" cy="475488"/>
           </a:xfrm>
           <a:prstGeom prst="rect">
             <a:avLst/>
@@ -8056,7 +8056,7 @@
           <a:noFill/>
         </p:spPr>
         <p:txBody>
-          <a:bodyPr wrap="square" anchor="t" lIns="25400" rIns="25400" tIns="25400" bIns="25400">
+          <a:bodyPr wrap="square" anchor="ctr" lIns="25400" rIns="25400" tIns="25400" bIns="25400">
             <a:spAutoFit/>
           </a:bodyPr>
           <a:lstStyle/>
@@ -8087,8 +8087,8 @@
         </p:nvSpPr>
         <p:spPr>
           <a:xfrm>
-            <a:off x="365761" y="1325880"/>
-            <a:ext cx="-54862" cy="438912"/>
+            <a:off x="2148840" y="1298448"/>
+            <a:ext cx="1362456" cy="475488"/>
           </a:xfrm>
           <a:prstGeom prst="roundRect">
             <a:avLst>
@@ -8133,8 +8133,8 @@
         </p:nvSpPr>
         <p:spPr>
           <a:xfrm>
-            <a:off x="438913" y="1389888"/>
-            <a:ext cx="-182878" cy="320040"/>
+            <a:off x="2221992" y="1298448"/>
+            <a:ext cx="1252728" cy="475488"/>
           </a:xfrm>
           <a:prstGeom prst="rect">
             <a:avLst/>
@@ -8142,7 +8142,7 @@
           <a:noFill/>
         </p:spPr>
         <p:txBody>
-          <a:bodyPr wrap="square" anchor="t" lIns="25400" rIns="25400" tIns="25400" bIns="25400">
+          <a:bodyPr wrap="square" anchor="ctr" lIns="25400" rIns="25400" tIns="25400" bIns="25400">
             <a:spAutoFit/>
           </a:bodyPr>
           <a:lstStyle/>
@@ -8173,8 +8173,8 @@
         </p:nvSpPr>
         <p:spPr>
           <a:xfrm>
-            <a:off x="365763" y="1325880"/>
-            <a:ext cx="-54861" cy="438912"/>
+            <a:off x="3566160" y="1298448"/>
+            <a:ext cx="2734056" cy="475488"/>
           </a:xfrm>
           <a:prstGeom prst="roundRect">
             <a:avLst>
@@ -8219,8 +8219,8 @@
         </p:nvSpPr>
         <p:spPr>
           <a:xfrm>
-            <a:off x="438915" y="1389888"/>
-            <a:ext cx="-182877" cy="320040"/>
+            <a:off x="3639312" y="1298448"/>
+            <a:ext cx="2624328" cy="475488"/>
           </a:xfrm>
           <a:prstGeom prst="rect">
             <a:avLst/>
@@ -8228,7 +8228,7 @@
           <a:noFill/>
         </p:spPr>
         <p:txBody>
-          <a:bodyPr wrap="square" anchor="t" lIns="25400" rIns="25400" tIns="25400" bIns="25400">
+          <a:bodyPr wrap="square" anchor="ctr" lIns="25400" rIns="25400" tIns="25400" bIns="25400">
             <a:spAutoFit/>
           </a:bodyPr>
           <a:lstStyle/>
@@ -8259,8 +8259,8 @@
         </p:nvSpPr>
         <p:spPr>
           <a:xfrm>
-            <a:off x="365766" y="1325880"/>
-            <a:ext cx="-54861" cy="438912"/>
+            <a:off x="6355080" y="1298448"/>
+            <a:ext cx="2825496" cy="475488"/>
           </a:xfrm>
           <a:prstGeom prst="roundRect">
             <a:avLst>
@@ -8305,8 +8305,8 @@
         </p:nvSpPr>
         <p:spPr>
           <a:xfrm>
-            <a:off x="438918" y="1389888"/>
-            <a:ext cx="-182877" cy="320040"/>
+            <a:off x="6428232" y="1298448"/>
+            <a:ext cx="2715768" cy="475488"/>
           </a:xfrm>
           <a:prstGeom prst="rect">
             <a:avLst/>
@@ -8314,7 +8314,7 @@
           <a:noFill/>
         </p:spPr>
         <p:txBody>
-          <a:bodyPr wrap="square" anchor="t" lIns="25400" rIns="25400" tIns="25400" bIns="25400">
+          <a:bodyPr wrap="square" anchor="ctr" lIns="25400" rIns="25400" tIns="25400" bIns="25400">
             <a:spAutoFit/>
           </a:bodyPr>
           <a:lstStyle/>
@@ -8345,8 +8345,8 @@
         </p:nvSpPr>
         <p:spPr>
           <a:xfrm>
-            <a:off x="365768" y="1325880"/>
-            <a:ext cx="-54861" cy="438912"/>
+            <a:off x="9235440" y="1298448"/>
+            <a:ext cx="2551176" cy="475488"/>
           </a:xfrm>
           <a:prstGeom prst="roundRect">
             <a:avLst>
@@ -8391,8 +8391,8 @@
         </p:nvSpPr>
         <p:spPr>
           <a:xfrm>
-            <a:off x="438920" y="1389888"/>
-            <a:ext cx="-182877" cy="320040"/>
+            <a:off x="9308592" y="1298448"/>
+            <a:ext cx="2441448" cy="475488"/>
           </a:xfrm>
           <a:prstGeom prst="rect">
             <a:avLst/>
@@ -8400,7 +8400,7 @@
           <a:noFill/>
         </p:spPr>
         <p:txBody>
-          <a:bodyPr wrap="square" anchor="t" lIns="25400" rIns="25400" tIns="25400" bIns="25400">
+          <a:bodyPr wrap="square" anchor="ctr" lIns="25400" rIns="25400" tIns="25400" bIns="25400">
             <a:spAutoFit/>
           </a:bodyPr>
           <a:lstStyle/>
@@ -8431,8 +8431,8 @@
         </p:nvSpPr>
         <p:spPr>
           <a:xfrm>
-            <a:off x="365760" y="1828800"/>
-            <a:ext cx="-54862" cy="475488"/>
+            <a:off x="320040" y="1828800"/>
+            <a:ext cx="1773936" cy="475488"/>
           </a:xfrm>
           <a:prstGeom prst="roundRect">
             <a:avLst>
@@ -8477,8 +8477,8 @@
         </p:nvSpPr>
         <p:spPr>
           <a:xfrm>
-            <a:off x="438912" y="1901952"/>
-            <a:ext cx="-182878" cy="347472"/>
+            <a:off x="411480" y="1828800"/>
+            <a:ext cx="1627632" cy="475488"/>
           </a:xfrm>
           <a:prstGeom prst="rect">
             <a:avLst/>
@@ -8497,7 +8497,7 @@
               </a:spcAft>
             </a:pPr>
             <a:r>
-              <a:rPr sz="1100" b="1">
+              <a:rPr sz="1200" b="1">
                 <a:solidFill>
                   <a:srgbClr val="E8D0A0"/>
                 </a:solidFill>
@@ -8517,8 +8517,8 @@
         </p:nvSpPr>
         <p:spPr>
           <a:xfrm>
-            <a:off x="365761" y="1828800"/>
-            <a:ext cx="-54862" cy="475488"/>
+            <a:off x="2148840" y="1828800"/>
+            <a:ext cx="1362456" cy="475488"/>
           </a:xfrm>
           <a:prstGeom prst="roundRect">
             <a:avLst>
@@ -8563,8 +8563,8 @@
         </p:nvSpPr>
         <p:spPr>
           <a:xfrm>
-            <a:off x="438913" y="1901952"/>
-            <a:ext cx="-182878" cy="347472"/>
+            <a:off x="2240280" y="1828800"/>
+            <a:ext cx="1216152" cy="475488"/>
           </a:xfrm>
           <a:prstGeom prst="rect">
             <a:avLst/>
@@ -8577,13 +8577,13 @@
           </a:bodyPr>
           <a:lstStyle/>
           <a:p>
-            <a:pPr algn="l">
+            <a:pPr algn="ctr">
               <a:spcAft>
                 <a:spcPts val="400"/>
               </a:spcAft>
             </a:pPr>
             <a:r>
-              <a:rPr sz="1100" b="0">
+              <a:rPr sz="1200" b="0">
                 <a:solidFill>
                   <a:srgbClr val="FFFFFF"/>
                 </a:solidFill>
@@ -8603,8 +8603,8 @@
         </p:nvSpPr>
         <p:spPr>
           <a:xfrm>
-            <a:off x="365763" y="1828800"/>
-            <a:ext cx="-54861" cy="475488"/>
+            <a:off x="3566160" y="1828800"/>
+            <a:ext cx="2734056" cy="475488"/>
           </a:xfrm>
           <a:prstGeom prst="roundRect">
             <a:avLst>
@@ -8649,8 +8649,8 @@
         </p:nvSpPr>
         <p:spPr>
           <a:xfrm>
-            <a:off x="438915" y="1901952"/>
-            <a:ext cx="-182877" cy="347472"/>
+            <a:off x="3657600" y="1828800"/>
+            <a:ext cx="2587752" cy="475488"/>
           </a:xfrm>
           <a:prstGeom prst="rect">
             <a:avLst/>
@@ -8663,20 +8663,20 @@
           </a:bodyPr>
           <a:lstStyle/>
           <a:p>
-            <a:pPr algn="l">
+            <a:pPr algn="ctr">
               <a:spcAft>
                 <a:spcPts val="400"/>
               </a:spcAft>
             </a:pPr>
             <a:r>
-              <a:rPr sz="1100" b="0">
+              <a:rPr sz="1200" b="0">
                 <a:solidFill>
                   <a:srgbClr val="FFFFFF"/>
                 </a:solidFill>
                 <a:latin typeface="微软雅黑"/>
                 <a:ea typeface="微软雅黑"/>
               </a:rPr>
-              <a:t>权益上新/答疑/活动</a:t>
+              <a:t>权益上新 / 答疑 / 活动</a:t>
             </a:r>
           </a:p>
         </p:txBody>
@@ -8689,8 +8689,8 @@
         </p:nvSpPr>
         <p:spPr>
           <a:xfrm>
-            <a:off x="365766" y="1828800"/>
-            <a:ext cx="-54861" cy="475488"/>
+            <a:off x="6355080" y="1828800"/>
+            <a:ext cx="2825496" cy="475488"/>
           </a:xfrm>
           <a:prstGeom prst="roundRect">
             <a:avLst>
@@ -8735,8 +8735,8 @@
         </p:nvSpPr>
         <p:spPr>
           <a:xfrm>
-            <a:off x="438918" y="1901952"/>
-            <a:ext cx="-182877" cy="347472"/>
+            <a:off x="6446520" y="1828800"/>
+            <a:ext cx="2679192" cy="475488"/>
           </a:xfrm>
           <a:prstGeom prst="rect">
             <a:avLst/>
@@ -8749,13 +8749,13 @@
           </a:bodyPr>
           <a:lstStyle/>
           <a:p>
-            <a:pPr algn="l">
+            <a:pPr algn="ctr">
               <a:spcAft>
                 <a:spcPts val="400"/>
               </a:spcAft>
             </a:pPr>
             <a:r>
-              <a:rPr sz="1100" b="0">
+              <a:rPr sz="1200" b="0">
                 <a:solidFill>
                   <a:srgbClr val="FFFFFF"/>
                 </a:solidFill>
@@ -8775,8 +8775,8 @@
         </p:nvSpPr>
         <p:spPr>
           <a:xfrm>
-            <a:off x="365768" y="1828800"/>
-            <a:ext cx="-54861" cy="475488"/>
+            <a:off x="9235440" y="1828800"/>
+            <a:ext cx="2551176" cy="475488"/>
           </a:xfrm>
           <a:prstGeom prst="roundRect">
             <a:avLst>
@@ -8821,8 +8821,8 @@
         </p:nvSpPr>
         <p:spPr>
           <a:xfrm>
-            <a:off x="438920" y="1901952"/>
-            <a:ext cx="-182877" cy="347472"/>
+            <a:off x="9326880" y="1828800"/>
+            <a:ext cx="2404872" cy="475488"/>
           </a:xfrm>
           <a:prstGeom prst="rect">
             <a:avLst/>
@@ -8835,13 +8835,13 @@
           </a:bodyPr>
           <a:lstStyle/>
           <a:p>
-            <a:pPr algn="l">
+            <a:pPr algn="ctr">
               <a:spcAft>
                 <a:spcPts val="400"/>
               </a:spcAft>
             </a:pPr>
             <a:r>
-              <a:rPr sz="1100" b="0">
+              <a:rPr sz="1200" b="0">
                 <a:solidFill>
                   <a:srgbClr val="FFFFFF"/>
                 </a:solidFill>
@@ -8861,8 +8861,8 @@
         </p:nvSpPr>
         <p:spPr>
           <a:xfrm>
-            <a:off x="365760" y="2359152"/>
-            <a:ext cx="-54862" cy="475488"/>
+            <a:off x="320040" y="2350008"/>
+            <a:ext cx="1773936" cy="475488"/>
           </a:xfrm>
           <a:prstGeom prst="roundRect">
             <a:avLst>
@@ -8907,8 +8907,8 @@
         </p:nvSpPr>
         <p:spPr>
           <a:xfrm>
-            <a:off x="438912" y="2432304"/>
-            <a:ext cx="-182878" cy="347472"/>
+            <a:off x="411480" y="2350008"/>
+            <a:ext cx="1627632" cy="475488"/>
           </a:xfrm>
           <a:prstGeom prst="rect">
             <a:avLst/>
@@ -8927,7 +8927,7 @@
               </a:spcAft>
             </a:pPr>
             <a:r>
-              <a:rPr sz="1100" b="1">
+              <a:rPr sz="1200" b="1">
                 <a:solidFill>
                   <a:srgbClr val="E8D0A0"/>
                 </a:solidFill>
@@ -8947,8 +8947,8 @@
         </p:nvSpPr>
         <p:spPr>
           <a:xfrm>
-            <a:off x="365761" y="2359152"/>
-            <a:ext cx="-54862" cy="475488"/>
+            <a:off x="2148840" y="2350008"/>
+            <a:ext cx="1362456" cy="475488"/>
           </a:xfrm>
           <a:prstGeom prst="roundRect">
             <a:avLst>
@@ -8993,8 +8993,8 @@
         </p:nvSpPr>
         <p:spPr>
           <a:xfrm>
-            <a:off x="438913" y="2432304"/>
-            <a:ext cx="-182878" cy="347472"/>
+            <a:off x="2240280" y="2350008"/>
+            <a:ext cx="1216152" cy="475488"/>
           </a:xfrm>
           <a:prstGeom prst="rect">
             <a:avLst/>
@@ -9007,13 +9007,13 @@
           </a:bodyPr>
           <a:lstStyle/>
           <a:p>
-            <a:pPr algn="l">
+            <a:pPr algn="ctr">
               <a:spcAft>
                 <a:spcPts val="400"/>
               </a:spcAft>
             </a:pPr>
             <a:r>
-              <a:rPr sz="1100" b="0">
+              <a:rPr sz="1200" b="0">
                 <a:solidFill>
                   <a:srgbClr val="FFFFFF"/>
                 </a:solidFill>
@@ -9033,8 +9033,8 @@
         </p:nvSpPr>
         <p:spPr>
           <a:xfrm>
-            <a:off x="365763" y="2359152"/>
-            <a:ext cx="-54861" cy="475488"/>
+            <a:off x="3566160" y="2350008"/>
+            <a:ext cx="2734056" cy="475488"/>
           </a:xfrm>
           <a:prstGeom prst="roundRect">
             <a:avLst>
@@ -9079,8 +9079,8 @@
         </p:nvSpPr>
         <p:spPr>
           <a:xfrm>
-            <a:off x="438915" y="2432304"/>
-            <a:ext cx="-182877" cy="347472"/>
+            <a:off x="3657600" y="2350008"/>
+            <a:ext cx="2587752" cy="475488"/>
           </a:xfrm>
           <a:prstGeom prst="rect">
             <a:avLst/>
@@ -9093,20 +9093,20 @@
           </a:bodyPr>
           <a:lstStyle/>
           <a:p>
-            <a:pPr algn="l">
+            <a:pPr algn="ctr">
               <a:spcAft>
                 <a:spcPts val="400"/>
               </a:spcAft>
             </a:pPr>
             <a:r>
-              <a:rPr sz="1100" b="0">
+              <a:rPr sz="1200" b="0">
                 <a:solidFill>
                   <a:srgbClr val="FFFFFF"/>
                 </a:solidFill>
                 <a:latin typeface="微软雅黑"/>
                 <a:ea typeface="微软雅黑"/>
               </a:rPr>
-              <a:t>政策解读/白皮书</a:t>
+              <a:t>政策解读 / 白皮书</a:t>
             </a:r>
           </a:p>
         </p:txBody>
@@ -9119,8 +9119,8 @@
         </p:nvSpPr>
         <p:spPr>
           <a:xfrm>
-            <a:off x="365766" y="2359152"/>
-            <a:ext cx="-54861" cy="475488"/>
+            <a:off x="6355080" y="2350008"/>
+            <a:ext cx="2825496" cy="475488"/>
           </a:xfrm>
           <a:prstGeom prst="roundRect">
             <a:avLst>
@@ -9165,8 +9165,8 @@
         </p:nvSpPr>
         <p:spPr>
           <a:xfrm>
-            <a:off x="438918" y="2432304"/>
-            <a:ext cx="-182877" cy="347472"/>
+            <a:off x="6446520" y="2350008"/>
+            <a:ext cx="2679192" cy="475488"/>
           </a:xfrm>
           <a:prstGeom prst="rect">
             <a:avLst/>
@@ -9179,13 +9179,13 @@
           </a:bodyPr>
           <a:lstStyle/>
           <a:p>
-            <a:pPr algn="l">
+            <a:pPr algn="ctr">
               <a:spcAft>
                 <a:spcPts val="400"/>
               </a:spcAft>
             </a:pPr>
             <a:r>
-              <a:rPr sz="1100" b="0">
+              <a:rPr sz="1200" b="0">
                 <a:solidFill>
                   <a:srgbClr val="FFFFFF"/>
                 </a:solidFill>
@@ -9205,8 +9205,8 @@
         </p:nvSpPr>
         <p:spPr>
           <a:xfrm>
-            <a:off x="365768" y="2359152"/>
-            <a:ext cx="-54861" cy="475488"/>
+            <a:off x="9235440" y="2350008"/>
+            <a:ext cx="2551176" cy="475488"/>
           </a:xfrm>
           <a:prstGeom prst="roundRect">
             <a:avLst>
@@ -9251,8 +9251,8 @@
         </p:nvSpPr>
         <p:spPr>
           <a:xfrm>
-            <a:off x="438920" y="2432304"/>
-            <a:ext cx="-182877" cy="347472"/>
+            <a:off x="9326880" y="2350008"/>
+            <a:ext cx="2404872" cy="475488"/>
           </a:xfrm>
           <a:prstGeom prst="rect">
             <a:avLst/>
@@ -9265,13 +9265,13 @@
           </a:bodyPr>
           <a:lstStyle/>
           <a:p>
-            <a:pPr algn="l">
+            <a:pPr algn="ctr">
               <a:spcAft>
                 <a:spcPts val="400"/>
               </a:spcAft>
             </a:pPr>
             <a:r>
-              <a:rPr sz="1100" b="0">
+              <a:rPr sz="1200" b="0">
                 <a:solidFill>
                   <a:srgbClr val="FFFFFF"/>
                 </a:solidFill>
@@ -9291,8 +9291,8 @@
         </p:nvSpPr>
         <p:spPr>
           <a:xfrm>
-            <a:off x="365760" y="2889504"/>
-            <a:ext cx="-54862" cy="475488"/>
+            <a:off x="320040" y="2871216"/>
+            <a:ext cx="1773936" cy="475488"/>
           </a:xfrm>
           <a:prstGeom prst="roundRect">
             <a:avLst>
@@ -9337,8 +9337,8 @@
         </p:nvSpPr>
         <p:spPr>
           <a:xfrm>
-            <a:off x="438912" y="2962656"/>
-            <a:ext cx="-182878" cy="347472"/>
+            <a:off x="411480" y="2871216"/>
+            <a:ext cx="1627632" cy="475488"/>
           </a:xfrm>
           <a:prstGeom prst="rect">
             <a:avLst/>
@@ -9357,7 +9357,7 @@
               </a:spcAft>
             </a:pPr>
             <a:r>
-              <a:rPr sz="1100" b="1">
+              <a:rPr sz="1200" b="1">
                 <a:solidFill>
                   <a:srgbClr val="E8D0A0"/>
                 </a:solidFill>
@@ -9377,8 +9377,8 @@
         </p:nvSpPr>
         <p:spPr>
           <a:xfrm>
-            <a:off x="365761" y="2889504"/>
-            <a:ext cx="-54862" cy="475488"/>
+            <a:off x="2148840" y="2871216"/>
+            <a:ext cx="1362456" cy="475488"/>
           </a:xfrm>
           <a:prstGeom prst="roundRect">
             <a:avLst>
@@ -9423,8 +9423,8 @@
         </p:nvSpPr>
         <p:spPr>
           <a:xfrm>
-            <a:off x="438913" y="2962656"/>
-            <a:ext cx="-182878" cy="347472"/>
+            <a:off x="2240280" y="2871216"/>
+            <a:ext cx="1216152" cy="475488"/>
           </a:xfrm>
           <a:prstGeom prst="rect">
             <a:avLst/>
@@ -9437,13 +9437,13 @@
           </a:bodyPr>
           <a:lstStyle/>
           <a:p>
-            <a:pPr algn="l">
+            <a:pPr algn="ctr">
               <a:spcAft>
                 <a:spcPts val="400"/>
               </a:spcAft>
             </a:pPr>
             <a:r>
-              <a:rPr sz="1100" b="0">
+              <a:rPr sz="1200" b="0">
                 <a:solidFill>
                   <a:srgbClr val="FFFFFF"/>
                 </a:solidFill>
@@ -9463,8 +9463,8 @@
         </p:nvSpPr>
         <p:spPr>
           <a:xfrm>
-            <a:off x="365763" y="2889504"/>
-            <a:ext cx="-54861" cy="475488"/>
+            <a:off x="3566160" y="2871216"/>
+            <a:ext cx="2734056" cy="475488"/>
           </a:xfrm>
           <a:prstGeom prst="roundRect">
             <a:avLst>
@@ -9509,8 +9509,8 @@
         </p:nvSpPr>
         <p:spPr>
           <a:xfrm>
-            <a:off x="438915" y="2962656"/>
-            <a:ext cx="-182877" cy="347472"/>
+            <a:off x="3657600" y="2871216"/>
+            <a:ext cx="2587752" cy="475488"/>
           </a:xfrm>
           <a:prstGeom prst="rect">
             <a:avLst/>
@@ -9523,20 +9523,20 @@
           </a:bodyPr>
           <a:lstStyle/>
           <a:p>
-            <a:pPr algn="l">
+            <a:pPr algn="ctr">
               <a:spcAft>
                 <a:spcPts val="400"/>
               </a:spcAft>
             </a:pPr>
             <a:r>
-              <a:rPr sz="1100" b="0">
+              <a:rPr sz="1200" b="0">
                 <a:solidFill>
                   <a:srgbClr val="FFFFFF"/>
                 </a:solidFill>
                 <a:latin typeface="微软雅黑"/>
                 <a:ea typeface="微软雅黑"/>
               </a:rPr>
-              <a:t>本地生活/活动招募</a:t>
+              <a:t>本地生活 / 活动招募</a:t>
             </a:r>
           </a:p>
         </p:txBody>
@@ -9549,8 +9549,8 @@
         </p:nvSpPr>
         <p:spPr>
           <a:xfrm>
-            <a:off x="365766" y="2889504"/>
-            <a:ext cx="-54861" cy="475488"/>
+            <a:off x="6355080" y="2871216"/>
+            <a:ext cx="2825496" cy="475488"/>
           </a:xfrm>
           <a:prstGeom prst="roundRect">
             <a:avLst>
@@ -9595,8 +9595,8 @@
         </p:nvSpPr>
         <p:spPr>
           <a:xfrm>
-            <a:off x="438918" y="2962656"/>
-            <a:ext cx="-182877" cy="347472"/>
+            <a:off x="6446520" y="2871216"/>
+            <a:ext cx="2679192" cy="475488"/>
           </a:xfrm>
           <a:prstGeom prst="rect">
             <a:avLst/>
@@ -9609,13 +9609,13 @@
           </a:bodyPr>
           <a:lstStyle/>
           <a:p>
-            <a:pPr algn="l">
+            <a:pPr algn="ctr">
               <a:spcAft>
                 <a:spcPts val="400"/>
               </a:spcAft>
             </a:pPr>
             <a:r>
-              <a:rPr sz="1100" b="0">
+              <a:rPr sz="1200" b="0">
                 <a:solidFill>
                   <a:srgbClr val="FFFFFF"/>
                 </a:solidFill>
@@ -9635,8 +9635,8 @@
         </p:nvSpPr>
         <p:spPr>
           <a:xfrm>
-            <a:off x="365768" y="2889504"/>
-            <a:ext cx="-54861" cy="475488"/>
+            <a:off x="9235440" y="2871216"/>
+            <a:ext cx="2551176" cy="475488"/>
           </a:xfrm>
           <a:prstGeom prst="roundRect">
             <a:avLst>
@@ -9681,8 +9681,8 @@
         </p:nvSpPr>
         <p:spPr>
           <a:xfrm>
-            <a:off x="438920" y="2962656"/>
-            <a:ext cx="-182877" cy="347472"/>
+            <a:off x="9326880" y="2871216"/>
+            <a:ext cx="2404872" cy="475488"/>
           </a:xfrm>
           <a:prstGeom prst="rect">
             <a:avLst/>
@@ -9695,13 +9695,13 @@
           </a:bodyPr>
           <a:lstStyle/>
           <a:p>
-            <a:pPr algn="l">
+            <a:pPr algn="ctr">
               <a:spcAft>
                 <a:spcPts val="400"/>
               </a:spcAft>
             </a:pPr>
             <a:r>
-              <a:rPr sz="1100" b="0">
+              <a:rPr sz="1200" b="0">
                 <a:solidFill>
                   <a:srgbClr val="FFFFFF"/>
                 </a:solidFill>
@@ -9721,8 +9721,8 @@
         </p:nvSpPr>
         <p:spPr>
           <a:xfrm>
-            <a:off x="365760" y="3419856"/>
-            <a:ext cx="-54862" cy="475488"/>
+            <a:off x="320040" y="3392424"/>
+            <a:ext cx="1773936" cy="475488"/>
           </a:xfrm>
           <a:prstGeom prst="roundRect">
             <a:avLst>
@@ -9767,8 +9767,8 @@
         </p:nvSpPr>
         <p:spPr>
           <a:xfrm>
-            <a:off x="438912" y="3493008"/>
-            <a:ext cx="-182878" cy="347472"/>
+            <a:off x="411480" y="3392424"/>
+            <a:ext cx="1627632" cy="475488"/>
           </a:xfrm>
           <a:prstGeom prst="rect">
             <a:avLst/>
@@ -9787,7 +9787,7 @@
               </a:spcAft>
             </a:pPr>
             <a:r>
-              <a:rPr sz="1100" b="1">
+              <a:rPr sz="1200" b="1">
                 <a:solidFill>
                   <a:srgbClr val="E8D0A0"/>
                 </a:solidFill>
@@ -9807,8 +9807,8 @@
         </p:nvSpPr>
         <p:spPr>
           <a:xfrm>
-            <a:off x="365761" y="3419856"/>
-            <a:ext cx="-54862" cy="475488"/>
+            <a:off x="2148840" y="3392424"/>
+            <a:ext cx="1362456" cy="475488"/>
           </a:xfrm>
           <a:prstGeom prst="roundRect">
             <a:avLst>
@@ -9853,8 +9853,8 @@
         </p:nvSpPr>
         <p:spPr>
           <a:xfrm>
-            <a:off x="438913" y="3493008"/>
-            <a:ext cx="-182878" cy="347472"/>
+            <a:off x="2240280" y="3392424"/>
+            <a:ext cx="1216152" cy="475488"/>
           </a:xfrm>
           <a:prstGeom prst="rect">
             <a:avLst/>
@@ -9867,13 +9867,13 @@
           </a:bodyPr>
           <a:lstStyle/>
           <a:p>
-            <a:pPr algn="l">
+            <a:pPr algn="ctr">
               <a:spcAft>
                 <a:spcPts val="400"/>
               </a:spcAft>
             </a:pPr>
             <a:r>
-              <a:rPr sz="1100" b="0">
+              <a:rPr sz="1200" b="0">
                 <a:solidFill>
                   <a:srgbClr val="FFFFFF"/>
                 </a:solidFill>
@@ -9893,8 +9893,8 @@
         </p:nvSpPr>
         <p:spPr>
           <a:xfrm>
-            <a:off x="365763" y="3419856"/>
-            <a:ext cx="-54861" cy="475488"/>
+            <a:off x="3566160" y="3392424"/>
+            <a:ext cx="2734056" cy="475488"/>
           </a:xfrm>
           <a:prstGeom prst="roundRect">
             <a:avLst>
@@ -9939,8 +9939,8 @@
         </p:nvSpPr>
         <p:spPr>
           <a:xfrm>
-            <a:off x="438915" y="3493008"/>
-            <a:ext cx="-182877" cy="347472"/>
+            <a:off x="3657600" y="3392424"/>
+            <a:ext cx="2587752" cy="475488"/>
           </a:xfrm>
           <a:prstGeom prst="rect">
             <a:avLst/>
@@ -9953,20 +9953,20 @@
           </a:bodyPr>
           <a:lstStyle/>
           <a:p>
-            <a:pPr algn="l">
+            <a:pPr algn="ctr">
               <a:spcAft>
                 <a:spcPts val="400"/>
               </a:spcAft>
             </a:pPr>
             <a:r>
-              <a:rPr sz="1100" b="0">
+              <a:rPr sz="1200" b="0">
                 <a:solidFill>
                   <a:srgbClr val="FFFFFF"/>
                 </a:solidFill>
                 <a:latin typeface="微软雅黑"/>
                 <a:ea typeface="微软雅黑"/>
               </a:rPr>
-              <a:t>活动相册/媒体合作</a:t>
+              <a:t>活动相册 / 媒体合作</a:t>
             </a:r>
           </a:p>
         </p:txBody>
@@ -9979,8 +9979,8 @@
         </p:nvSpPr>
         <p:spPr>
           <a:xfrm>
-            <a:off x="365766" y="3419856"/>
-            <a:ext cx="-54861" cy="475488"/>
+            <a:off x="6355080" y="3392424"/>
+            <a:ext cx="2825496" cy="475488"/>
           </a:xfrm>
           <a:prstGeom prst="roundRect">
             <a:avLst>
@@ -10025,8 +10025,8 @@
         </p:nvSpPr>
         <p:spPr>
           <a:xfrm>
-            <a:off x="438918" y="3493008"/>
-            <a:ext cx="-182877" cy="347472"/>
+            <a:off x="6446520" y="3392424"/>
+            <a:ext cx="2679192" cy="475488"/>
           </a:xfrm>
           <a:prstGeom prst="rect">
             <a:avLst/>
@@ -10039,13 +10039,13 @@
           </a:bodyPr>
           <a:lstStyle/>
           <a:p>
-            <a:pPr algn="l">
+            <a:pPr algn="ctr">
               <a:spcAft>
                 <a:spcPts val="400"/>
               </a:spcAft>
             </a:pPr>
             <a:r>
-              <a:rPr sz="1100" b="0">
+              <a:rPr sz="1200" b="0">
                 <a:solidFill>
                   <a:srgbClr val="FFFFFF"/>
                 </a:solidFill>
@@ -10065,8 +10065,8 @@
         </p:nvSpPr>
         <p:spPr>
           <a:xfrm>
-            <a:off x="365768" y="3419856"/>
-            <a:ext cx="-54861" cy="475488"/>
+            <a:off x="9235440" y="3392424"/>
+            <a:ext cx="2551176" cy="475488"/>
           </a:xfrm>
           <a:prstGeom prst="roundRect">
             <a:avLst>
@@ -10111,8 +10111,8 @@
         </p:nvSpPr>
         <p:spPr>
           <a:xfrm>
-            <a:off x="438920" y="3493008"/>
-            <a:ext cx="-182877" cy="347472"/>
+            <a:off x="9326880" y="3392424"/>
+            <a:ext cx="2404872" cy="475488"/>
           </a:xfrm>
           <a:prstGeom prst="rect">
             <a:avLst/>
@@ -10125,13 +10125,13 @@
           </a:bodyPr>
           <a:lstStyle/>
           <a:p>
-            <a:pPr algn="l">
+            <a:pPr algn="ctr">
               <a:spcAft>
                 <a:spcPts val="400"/>
               </a:spcAft>
             </a:pPr>
             <a:r>
-              <a:rPr sz="1100" b="0">
+              <a:rPr sz="1200" b="0">
                 <a:solidFill>
                   <a:srgbClr val="FFFFFF"/>
                 </a:solidFill>
@@ -10151,8 +10151,8 @@
         </p:nvSpPr>
         <p:spPr>
           <a:xfrm>
-            <a:off x="365760" y="3950208"/>
-            <a:ext cx="-54862" cy="475488"/>
+            <a:off x="320040" y="3913632"/>
+            <a:ext cx="1773936" cy="475488"/>
           </a:xfrm>
           <a:prstGeom prst="roundRect">
             <a:avLst>
@@ -10197,8 +10197,8 @@
         </p:nvSpPr>
         <p:spPr>
           <a:xfrm>
-            <a:off x="438912" y="4023360"/>
-            <a:ext cx="-182878" cy="347472"/>
+            <a:off x="411480" y="3913632"/>
+            <a:ext cx="1627632" cy="475488"/>
           </a:xfrm>
           <a:prstGeom prst="rect">
             <a:avLst/>
@@ -10217,7 +10217,7 @@
               </a:spcAft>
             </a:pPr>
             <a:r>
-              <a:rPr sz="1100" b="1">
+              <a:rPr sz="1200" b="1">
                 <a:solidFill>
                   <a:srgbClr val="E8D0A0"/>
                 </a:solidFill>
@@ -10237,8 +10237,8 @@
         </p:nvSpPr>
         <p:spPr>
           <a:xfrm>
-            <a:off x="365761" y="3950208"/>
-            <a:ext cx="-54862" cy="475488"/>
+            <a:off x="2148840" y="3913632"/>
+            <a:ext cx="1362456" cy="475488"/>
           </a:xfrm>
           <a:prstGeom prst="roundRect">
             <a:avLst>
@@ -10283,8 +10283,8 @@
         </p:nvSpPr>
         <p:spPr>
           <a:xfrm>
-            <a:off x="438913" y="4023360"/>
-            <a:ext cx="-182878" cy="347472"/>
+            <a:off x="2240280" y="3913632"/>
+            <a:ext cx="1216152" cy="475488"/>
           </a:xfrm>
           <a:prstGeom prst="rect">
             <a:avLst/>
@@ -10297,13 +10297,13 @@
           </a:bodyPr>
           <a:lstStyle/>
           <a:p>
-            <a:pPr algn="l">
+            <a:pPr algn="ctr">
               <a:spcAft>
                 <a:spcPts val="400"/>
               </a:spcAft>
             </a:pPr>
             <a:r>
-              <a:rPr sz="1100" b="0">
+              <a:rPr sz="1200" b="0">
                 <a:solidFill>
                   <a:srgbClr val="FFFFFF"/>
                 </a:solidFill>
@@ -10323,8 +10323,8 @@
         </p:nvSpPr>
         <p:spPr>
           <a:xfrm>
-            <a:off x="365763" y="3950208"/>
-            <a:ext cx="-54861" cy="475488"/>
+            <a:off x="3566160" y="3913632"/>
+            <a:ext cx="2734056" cy="475488"/>
           </a:xfrm>
           <a:prstGeom prst="roundRect">
             <a:avLst>
@@ -10369,8 +10369,8 @@
         </p:nvSpPr>
         <p:spPr>
           <a:xfrm>
-            <a:off x="438915" y="4023360"/>
-            <a:ext cx="-182877" cy="347472"/>
+            <a:off x="3657600" y="3913632"/>
+            <a:ext cx="2587752" cy="475488"/>
           </a:xfrm>
           <a:prstGeom prst="rect">
             <a:avLst/>
@@ -10383,20 +10383,20 @@
           </a:bodyPr>
           <a:lstStyle/>
           <a:p>
-            <a:pPr algn="l">
+            <a:pPr algn="ctr">
               <a:spcAft>
                 <a:spcPts val="400"/>
               </a:spcAft>
             </a:pPr>
             <a:r>
-              <a:rPr sz="1100" b="0">
+              <a:rPr sz="1200" b="0">
                 <a:solidFill>
                   <a:srgbClr val="FFFFFF"/>
                 </a:solidFill>
                 <a:latin typeface="微软雅黑"/>
                 <a:ea typeface="微软雅黑"/>
               </a:rPr>
-              <a:t>现场/探店/会员故事</a:t>
+              <a:t>现场 / 探店 / 会员故事</a:t>
             </a:r>
           </a:p>
         </p:txBody>
@@ -10409,8 +10409,8 @@
         </p:nvSpPr>
         <p:spPr>
           <a:xfrm>
-            <a:off x="365766" y="3950208"/>
-            <a:ext cx="-54861" cy="475488"/>
+            <a:off x="6355080" y="3913632"/>
+            <a:ext cx="2825496" cy="475488"/>
           </a:xfrm>
           <a:prstGeom prst="roundRect">
             <a:avLst>
@@ -10455,8 +10455,8 @@
         </p:nvSpPr>
         <p:spPr>
           <a:xfrm>
-            <a:off x="438918" y="4023360"/>
-            <a:ext cx="-182877" cy="347472"/>
+            <a:off x="6446520" y="3913632"/>
+            <a:ext cx="2679192" cy="475488"/>
           </a:xfrm>
           <a:prstGeom prst="rect">
             <a:avLst/>
@@ -10469,13 +10469,13 @@
           </a:bodyPr>
           <a:lstStyle/>
           <a:p>
-            <a:pPr algn="l">
+            <a:pPr algn="ctr">
               <a:spcAft>
                 <a:spcPts val="400"/>
               </a:spcAft>
             </a:pPr>
             <a:r>
-              <a:rPr sz="1100" b="0">
+              <a:rPr sz="1200" b="0">
                 <a:solidFill>
                   <a:srgbClr val="FFFFFF"/>
                 </a:solidFill>
@@ -10495,8 +10495,8 @@
         </p:nvSpPr>
         <p:spPr>
           <a:xfrm>
-            <a:off x="365768" y="3950208"/>
-            <a:ext cx="-54861" cy="475488"/>
+            <a:off x="9235440" y="3913632"/>
+            <a:ext cx="2551176" cy="475488"/>
           </a:xfrm>
           <a:prstGeom prst="roundRect">
             <a:avLst>
@@ -10541,8 +10541,8 @@
         </p:nvSpPr>
         <p:spPr>
           <a:xfrm>
-            <a:off x="438920" y="4023360"/>
-            <a:ext cx="-182877" cy="347472"/>
+            <a:off x="9326880" y="3913632"/>
+            <a:ext cx="2404872" cy="475488"/>
           </a:xfrm>
           <a:prstGeom prst="rect">
             <a:avLst/>
@@ -10555,13 +10555,13 @@
           </a:bodyPr>
           <a:lstStyle/>
           <a:p>
-            <a:pPr algn="l">
+            <a:pPr algn="ctr">
               <a:spcAft>
                 <a:spcPts val="400"/>
               </a:spcAft>
             </a:pPr>
             <a:r>
-              <a:rPr sz="1100" b="0">
+              <a:rPr sz="1200" b="0">
                 <a:solidFill>
                   <a:srgbClr val="FFFFFF"/>
                 </a:solidFill>
@@ -10581,8 +10581,8 @@
         </p:nvSpPr>
         <p:spPr>
           <a:xfrm>
-            <a:off x="365760" y="4480560"/>
-            <a:ext cx="-54862" cy="475488"/>
+            <a:off x="320040" y="4434840"/>
+            <a:ext cx="1773936" cy="475488"/>
           </a:xfrm>
           <a:prstGeom prst="roundRect">
             <a:avLst>
@@ -10627,8 +10627,8 @@
         </p:nvSpPr>
         <p:spPr>
           <a:xfrm>
-            <a:off x="438912" y="4553712"/>
-            <a:ext cx="-182878" cy="347472"/>
+            <a:off x="411480" y="4434840"/>
+            <a:ext cx="1627632" cy="475488"/>
           </a:xfrm>
           <a:prstGeom prst="rect">
             <a:avLst/>
@@ -10647,7 +10647,7 @@
               </a:spcAft>
             </a:pPr>
             <a:r>
-              <a:rPr sz="1100" b="1">
+              <a:rPr sz="1200" b="1">
                 <a:solidFill>
                   <a:srgbClr val="E8D0A0"/>
                 </a:solidFill>
@@ -10667,8 +10667,8 @@
         </p:nvSpPr>
         <p:spPr>
           <a:xfrm>
-            <a:off x="365761" y="4480560"/>
-            <a:ext cx="-54862" cy="475488"/>
+            <a:off x="2148840" y="4434840"/>
+            <a:ext cx="1362456" cy="475488"/>
           </a:xfrm>
           <a:prstGeom prst="roundRect">
             <a:avLst>
@@ -10713,8 +10713,8 @@
         </p:nvSpPr>
         <p:spPr>
           <a:xfrm>
-            <a:off x="438913" y="4553712"/>
-            <a:ext cx="-182878" cy="347472"/>
+            <a:off x="2240280" y="4434840"/>
+            <a:ext cx="1216152" cy="475488"/>
           </a:xfrm>
           <a:prstGeom prst="rect">
             <a:avLst/>
@@ -10727,13 +10727,13 @@
           </a:bodyPr>
           <a:lstStyle/>
           <a:p>
-            <a:pPr algn="l">
+            <a:pPr algn="ctr">
               <a:spcAft>
                 <a:spcPts val="400"/>
               </a:spcAft>
             </a:pPr>
             <a:r>
-              <a:rPr sz="1100" b="0">
+              <a:rPr sz="1200" b="0">
                 <a:solidFill>
                   <a:srgbClr val="FFFFFF"/>
                 </a:solidFill>
@@ -10753,8 +10753,8 @@
         </p:nvSpPr>
         <p:spPr>
           <a:xfrm>
-            <a:off x="365763" y="4480560"/>
-            <a:ext cx="-54861" cy="475488"/>
+            <a:off x="3566160" y="4434840"/>
+            <a:ext cx="2734056" cy="475488"/>
           </a:xfrm>
           <a:prstGeom prst="roundRect">
             <a:avLst>
@@ -10799,8 +10799,8 @@
         </p:nvSpPr>
         <p:spPr>
           <a:xfrm>
-            <a:off x="438915" y="4553712"/>
-            <a:ext cx="-182877" cy="347472"/>
+            <a:off x="3657600" y="4434840"/>
+            <a:ext cx="2587752" cy="475488"/>
           </a:xfrm>
           <a:prstGeom prst="rect">
             <a:avLst/>
@@ -10813,20 +10813,20 @@
           </a:bodyPr>
           <a:lstStyle/>
           <a:p>
-            <a:pPr algn="l">
+            <a:pPr algn="ctr">
               <a:spcAft>
                 <a:spcPts val="400"/>
               </a:spcAft>
             </a:pPr>
             <a:r>
-              <a:rPr sz="1100" b="0">
+              <a:rPr sz="1200" b="0">
                 <a:solidFill>
                   <a:srgbClr val="FFFFFF"/>
                 </a:solidFill>
                 <a:latin typeface="微软雅黑"/>
                 <a:ea typeface="微软雅黑"/>
               </a:rPr>
-              <a:t>峰会/合作案例/招聘</a:t>
+              <a:t>峰会 / 合作案例 / 招聘</a:t>
             </a:r>
           </a:p>
         </p:txBody>
@@ -10839,8 +10839,8 @@
         </p:nvSpPr>
         <p:spPr>
           <a:xfrm>
-            <a:off x="365766" y="4480560"/>
-            <a:ext cx="-54861" cy="475488"/>
+            <a:off x="6355080" y="4434840"/>
+            <a:ext cx="2825496" cy="475488"/>
           </a:xfrm>
           <a:prstGeom prst="roundRect">
             <a:avLst>
@@ -10885,8 +10885,8 @@
         </p:nvSpPr>
         <p:spPr>
           <a:xfrm>
-            <a:off x="438918" y="4553712"/>
-            <a:ext cx="-182877" cy="347472"/>
+            <a:off x="6446520" y="4434840"/>
+            <a:ext cx="2679192" cy="475488"/>
           </a:xfrm>
           <a:prstGeom prst="rect">
             <a:avLst/>
@@ -10899,13 +10899,13 @@
           </a:bodyPr>
           <a:lstStyle/>
           <a:p>
-            <a:pPr algn="l">
+            <a:pPr algn="ctr">
               <a:spcAft>
                 <a:spcPts val="400"/>
               </a:spcAft>
             </a:pPr>
             <a:r>
-              <a:rPr sz="1100" b="0">
+              <a:rPr sz="1200" b="0">
                 <a:solidFill>
                   <a:srgbClr val="FFFFFF"/>
                 </a:solidFill>
@@ -10925,8 +10925,8 @@
         </p:nvSpPr>
         <p:spPr>
           <a:xfrm>
-            <a:off x="365768" y="4480560"/>
-            <a:ext cx="-54861" cy="475488"/>
+            <a:off x="9235440" y="4434840"/>
+            <a:ext cx="2551176" cy="475488"/>
           </a:xfrm>
           <a:prstGeom prst="roundRect">
             <a:avLst>
@@ -10971,8 +10971,8 @@
         </p:nvSpPr>
         <p:spPr>
           <a:xfrm>
-            <a:off x="438920" y="4553712"/>
-            <a:ext cx="-182877" cy="347472"/>
+            <a:off x="9326880" y="4434840"/>
+            <a:ext cx="2404872" cy="475488"/>
           </a:xfrm>
           <a:prstGeom prst="rect">
             <a:avLst/>
@@ -10985,13 +10985,13 @@
           </a:bodyPr>
           <a:lstStyle/>
           <a:p>
-            <a:pPr algn="l">
+            <a:pPr algn="ctr">
               <a:spcAft>
                 <a:spcPts val="400"/>
               </a:spcAft>
             </a:pPr>
             <a:r>
-              <a:rPr sz="1100" b="0">
+              <a:rPr sz="1200" b="0">
                 <a:solidFill>
                   <a:srgbClr val="FFFFFF"/>
                 </a:solidFill>
@@ -11011,8 +11011,8 @@
         </p:nvSpPr>
         <p:spPr>
           <a:xfrm>
-            <a:off x="365760" y="5010912"/>
-            <a:ext cx="-54862" cy="475488"/>
+            <a:off x="320040" y="4956048"/>
+            <a:ext cx="1773936" cy="475488"/>
           </a:xfrm>
           <a:prstGeom prst="roundRect">
             <a:avLst>
@@ -11057,8 +11057,8 @@
         </p:nvSpPr>
         <p:spPr>
           <a:xfrm>
-            <a:off x="438912" y="5084064"/>
-            <a:ext cx="-182878" cy="347472"/>
+            <a:off x="411480" y="4956048"/>
+            <a:ext cx="1627632" cy="475488"/>
           </a:xfrm>
           <a:prstGeom prst="rect">
             <a:avLst/>
@@ -11077,7 +11077,7 @@
               </a:spcAft>
             </a:pPr>
             <a:r>
-              <a:rPr sz="1100" b="1">
+              <a:rPr sz="1200" b="1">
                 <a:solidFill>
                   <a:srgbClr val="E8D0A0"/>
                 </a:solidFill>
@@ -11097,8 +11097,8 @@
         </p:nvSpPr>
         <p:spPr>
           <a:xfrm>
-            <a:off x="365761" y="5010912"/>
-            <a:ext cx="-54862" cy="475488"/>
+            <a:off x="2148840" y="4956048"/>
+            <a:ext cx="1362456" cy="475488"/>
           </a:xfrm>
           <a:prstGeom prst="roundRect">
             <a:avLst>
@@ -11143,8 +11143,8 @@
         </p:nvSpPr>
         <p:spPr>
           <a:xfrm>
-            <a:off x="438913" y="5084064"/>
-            <a:ext cx="-182878" cy="347472"/>
+            <a:off x="2240280" y="4956048"/>
+            <a:ext cx="1216152" cy="475488"/>
           </a:xfrm>
           <a:prstGeom prst="rect">
             <a:avLst/>
@@ -11157,13 +11157,13 @@
           </a:bodyPr>
           <a:lstStyle/>
           <a:p>
-            <a:pPr algn="l">
+            <a:pPr algn="ctr">
               <a:spcAft>
                 <a:spcPts val="400"/>
               </a:spcAft>
             </a:pPr>
             <a:r>
-              <a:rPr sz="1100" b="0">
+              <a:rPr sz="1200" b="0">
                 <a:solidFill>
                   <a:srgbClr val="FFFFFF"/>
                 </a:solidFill>
@@ -11183,8 +11183,8 @@
         </p:nvSpPr>
         <p:spPr>
           <a:xfrm>
-            <a:off x="365763" y="5010912"/>
-            <a:ext cx="-54861" cy="475488"/>
+            <a:off x="3566160" y="4956048"/>
+            <a:ext cx="2734056" cy="475488"/>
           </a:xfrm>
           <a:prstGeom prst="roundRect">
             <a:avLst>
@@ -11229,8 +11229,8 @@
         </p:nvSpPr>
         <p:spPr>
           <a:xfrm>
-            <a:off x="438915" y="5084064"/>
-            <a:ext cx="-182877" cy="347472"/>
+            <a:off x="3657600" y="4956048"/>
+            <a:ext cx="2587752" cy="475488"/>
           </a:xfrm>
           <a:prstGeom prst="rect">
             <a:avLst/>
@@ -11243,20 +11243,20 @@
           </a:bodyPr>
           <a:lstStyle/>
           <a:p>
-            <a:pPr algn="l">
+            <a:pPr algn="ctr">
               <a:spcAft>
                 <a:spcPts val="400"/>
               </a:spcAft>
             </a:pPr>
             <a:r>
-              <a:rPr sz="1100" b="0">
+              <a:rPr sz="1200" b="0">
                 <a:solidFill>
                   <a:srgbClr val="FFFFFF"/>
                 </a:solidFill>
                 <a:latin typeface="微软雅黑"/>
                 <a:ea typeface="微软雅黑"/>
               </a:rPr>
-              <a:t>活动提醒/紧急通知</a:t>
+              <a:t>活动提醒 / 紧急通知</a:t>
             </a:r>
           </a:p>
         </p:txBody>
@@ -11269,8 +11269,8 @@
         </p:nvSpPr>
         <p:spPr>
           <a:xfrm>
-            <a:off x="365766" y="5010912"/>
-            <a:ext cx="-54861" cy="475488"/>
+            <a:off x="6355080" y="4956048"/>
+            <a:ext cx="2825496" cy="475488"/>
           </a:xfrm>
           <a:prstGeom prst="roundRect">
             <a:avLst>
@@ -11315,8 +11315,8 @@
         </p:nvSpPr>
         <p:spPr>
           <a:xfrm>
-            <a:off x="438918" y="5084064"/>
-            <a:ext cx="-182877" cy="347472"/>
+            <a:off x="6446520" y="4956048"/>
+            <a:ext cx="2679192" cy="475488"/>
           </a:xfrm>
           <a:prstGeom prst="rect">
             <a:avLst/>
@@ -11329,13 +11329,13 @@
           </a:bodyPr>
           <a:lstStyle/>
           <a:p>
-            <a:pPr algn="l">
+            <a:pPr algn="ctr">
               <a:spcAft>
                 <a:spcPts val="400"/>
               </a:spcAft>
             </a:pPr>
             <a:r>
-              <a:rPr sz="1100" b="0">
+              <a:rPr sz="1200" b="0">
                 <a:solidFill>
                   <a:srgbClr val="FFFFFF"/>
                 </a:solidFill>
@@ -11355,8 +11355,8 @@
         </p:nvSpPr>
         <p:spPr>
           <a:xfrm>
-            <a:off x="365768" y="5010912"/>
-            <a:ext cx="-54861" cy="475488"/>
+            <a:off x="9235440" y="4956048"/>
+            <a:ext cx="2551176" cy="475488"/>
           </a:xfrm>
           <a:prstGeom prst="roundRect">
             <a:avLst>
@@ -11401,8 +11401,8 @@
         </p:nvSpPr>
         <p:spPr>
           <a:xfrm>
-            <a:off x="438920" y="5084064"/>
-            <a:ext cx="-182877" cy="347472"/>
+            <a:off x="9326880" y="4956048"/>
+            <a:ext cx="2404872" cy="475488"/>
           </a:xfrm>
           <a:prstGeom prst="rect">
             <a:avLst/>
@@ -11415,13 +11415,13 @@
           </a:bodyPr>
           <a:lstStyle/>
           <a:p>
-            <a:pPr algn="l">
+            <a:pPr algn="ctr">
               <a:spcAft>
                 <a:spcPts val="400"/>
               </a:spcAft>
             </a:pPr>
             <a:r>
-              <a:rPr sz="1100" b="0">
+              <a:rPr sz="1200" b="0">
                 <a:solidFill>
                   <a:srgbClr val="FFFFFF"/>
                 </a:solidFill>
@@ -11441,8 +11441,8 @@
         </p:nvSpPr>
         <p:spPr>
           <a:xfrm>
-            <a:off x="365760" y="5541264"/>
-            <a:ext cx="-54862" cy="475488"/>
+            <a:off x="320040" y="5477256"/>
+            <a:ext cx="1773936" cy="475488"/>
           </a:xfrm>
           <a:prstGeom prst="roundRect">
             <a:avLst>
@@ -11487,8 +11487,8 @@
         </p:nvSpPr>
         <p:spPr>
           <a:xfrm>
-            <a:off x="438912" y="5614416"/>
-            <a:ext cx="-182878" cy="347472"/>
+            <a:off x="411480" y="5477256"/>
+            <a:ext cx="1627632" cy="475488"/>
           </a:xfrm>
           <a:prstGeom prst="rect">
             <a:avLst/>
@@ -11507,7 +11507,7 @@
               </a:spcAft>
             </a:pPr>
             <a:r>
-              <a:rPr sz="1100" b="1">
+              <a:rPr sz="1200" b="1">
                 <a:solidFill>
                   <a:srgbClr val="E8D0A0"/>
                 </a:solidFill>
@@ -11527,8 +11527,8 @@
         </p:nvSpPr>
         <p:spPr>
           <a:xfrm>
-            <a:off x="365761" y="5541264"/>
-            <a:ext cx="-54862" cy="475488"/>
+            <a:off x="2148840" y="5477256"/>
+            <a:ext cx="1362456" cy="475488"/>
           </a:xfrm>
           <a:prstGeom prst="roundRect">
             <a:avLst>
@@ -11573,8 +11573,8 @@
         </p:nvSpPr>
         <p:spPr>
           <a:xfrm>
-            <a:off x="438913" y="5614416"/>
-            <a:ext cx="-182878" cy="347472"/>
+            <a:off x="2240280" y="5477256"/>
+            <a:ext cx="1216152" cy="475488"/>
           </a:xfrm>
           <a:prstGeom prst="rect">
             <a:avLst/>
@@ -11587,13 +11587,13 @@
           </a:bodyPr>
           <a:lstStyle/>
           <a:p>
-            <a:pPr algn="l">
+            <a:pPr algn="ctr">
               <a:spcAft>
                 <a:spcPts val="400"/>
               </a:spcAft>
             </a:pPr>
             <a:r>
-              <a:rPr sz="1100" b="0">
+              <a:rPr sz="1200" b="0">
                 <a:solidFill>
                   <a:srgbClr val="FFFFFF"/>
                 </a:solidFill>
@@ -11613,8 +11613,8 @@
         </p:nvSpPr>
         <p:spPr>
           <a:xfrm>
-            <a:off x="365763" y="5541264"/>
-            <a:ext cx="-54861" cy="475488"/>
+            <a:off x="3566160" y="5477256"/>
+            <a:ext cx="2734056" cy="475488"/>
           </a:xfrm>
           <a:prstGeom prst="roundRect">
             <a:avLst>
@@ -11659,8 +11659,8 @@
         </p:nvSpPr>
         <p:spPr>
           <a:xfrm>
-            <a:off x="438915" y="5614416"/>
-            <a:ext cx="-182877" cy="347472"/>
+            <a:off x="3657600" y="5477256"/>
+            <a:ext cx="2587752" cy="475488"/>
           </a:xfrm>
           <a:prstGeom prst="rect">
             <a:avLst/>
@@ -11673,20 +11673,20 @@
           </a:bodyPr>
           <a:lstStyle/>
           <a:p>
-            <a:pPr algn="l">
+            <a:pPr algn="ctr">
               <a:spcAft>
                 <a:spcPts val="400"/>
               </a:spcAft>
             </a:pPr>
             <a:r>
-              <a:rPr sz="1100" b="0">
+              <a:rPr sz="1200" b="0">
                 <a:solidFill>
                   <a:srgbClr val="FFFFFF"/>
                 </a:solidFill>
                 <a:latin typeface="微软雅黑"/>
                 <a:ea typeface="微软雅黑"/>
               </a:rPr>
-              <a:t>月度沙龙/需求墙</a:t>
+              <a:t>月度沙龙 / 需求墙</a:t>
             </a:r>
           </a:p>
         </p:txBody>
@@ -11699,8 +11699,8 @@
         </p:nvSpPr>
         <p:spPr>
           <a:xfrm>
-            <a:off x="365766" y="5541264"/>
-            <a:ext cx="-54861" cy="475488"/>
+            <a:off x="6355080" y="5477256"/>
+            <a:ext cx="2825496" cy="475488"/>
           </a:xfrm>
           <a:prstGeom prst="roundRect">
             <a:avLst>
@@ -11745,8 +11745,8 @@
         </p:nvSpPr>
         <p:spPr>
           <a:xfrm>
-            <a:off x="438918" y="5614416"/>
-            <a:ext cx="-182877" cy="347472"/>
+            <a:off x="6446520" y="5477256"/>
+            <a:ext cx="2679192" cy="475488"/>
           </a:xfrm>
           <a:prstGeom prst="rect">
             <a:avLst/>
@@ -11759,20 +11759,20 @@
           </a:bodyPr>
           <a:lstStyle/>
           <a:p>
-            <a:pPr algn="l">
+            <a:pPr algn="ctr">
               <a:spcAft>
                 <a:spcPts val="400"/>
               </a:spcAft>
             </a:pPr>
             <a:r>
-              <a:rPr sz="1100" b="0">
+              <a:rPr sz="1200" b="0">
                 <a:solidFill>
                   <a:srgbClr val="FFFFFF"/>
                 </a:solidFill>
                 <a:latin typeface="微软雅黑"/>
                 <a:ea typeface="微软雅黑"/>
               </a:rPr>
-              <a:t>12 行业分会</a:t>
+              <a:t>12 个行业分会</a:t>
             </a:r>
           </a:p>
         </p:txBody>
@@ -11785,8 +11785,8 @@
         </p:nvSpPr>
         <p:spPr>
           <a:xfrm>
-            <a:off x="365768" y="5541264"/>
-            <a:ext cx="-54861" cy="475488"/>
+            <a:off x="9235440" y="5477256"/>
+            <a:ext cx="2551176" cy="475488"/>
           </a:xfrm>
           <a:prstGeom prst="roundRect">
             <a:avLst>
@@ -11831,8 +11831,8 @@
         </p:nvSpPr>
         <p:spPr>
           <a:xfrm>
-            <a:off x="438920" y="5614416"/>
-            <a:ext cx="-182877" cy="347472"/>
+            <a:off x="9326880" y="5477256"/>
+            <a:ext cx="2404872" cy="475488"/>
           </a:xfrm>
           <a:prstGeom prst="rect">
             <a:avLst/>
@@ -11845,13 +11845,13 @@
           </a:bodyPr>
           <a:lstStyle/>
           <a:p>
-            <a:pPr algn="l">
+            <a:pPr algn="ctr">
               <a:spcAft>
                 <a:spcPts val="400"/>
               </a:spcAft>
             </a:pPr>
             <a:r>
-              <a:rPr sz="1100" b="0">
+              <a:rPr sz="1200" b="0">
                 <a:solidFill>
                   <a:srgbClr val="FFFFFF"/>
                 </a:solidFill>
@@ -31290,8 +31290,8 @@
         </p:nvSpPr>
         <p:spPr>
           <a:xfrm>
-            <a:off x="411480" y="1371600"/>
-            <a:ext cx="-54861" cy="502920"/>
+            <a:off x="365760" y="1371600"/>
+            <a:ext cx="2093976" cy="713232"/>
           </a:xfrm>
           <a:prstGeom prst="roundRect">
             <a:avLst>
@@ -31336,8 +31336,8 @@
         </p:nvSpPr>
         <p:spPr>
           <a:xfrm>
-            <a:off x="484632" y="1463040"/>
-            <a:ext cx="-182877" cy="365760"/>
+            <a:off x="438912" y="1371600"/>
+            <a:ext cx="1984248" cy="713232"/>
           </a:xfrm>
           <a:prstGeom prst="rect">
             <a:avLst/>
@@ -31345,7 +31345,7 @@
           <a:noFill/>
         </p:spPr>
         <p:txBody>
-          <a:bodyPr wrap="square" anchor="t" lIns="25400" rIns="25400" tIns="25400" bIns="25400">
+          <a:bodyPr wrap="square" anchor="ctr" lIns="25400" rIns="25400" tIns="25400" bIns="25400">
             <a:spAutoFit/>
           </a:bodyPr>
           <a:lstStyle/>
@@ -31356,7 +31356,7 @@
               </a:spcAft>
             </a:pPr>
             <a:r>
-              <a:rPr sz="1200" b="1">
+              <a:rPr sz="1300" b="1">
                 <a:solidFill>
                   <a:srgbClr val="0B1F2A"/>
                 </a:solidFill>
@@ -31376,8 +31376,8 @@
         </p:nvSpPr>
         <p:spPr>
           <a:xfrm>
-            <a:off x="411482" y="1371600"/>
-            <a:ext cx="-54861" cy="502920"/>
+            <a:off x="2514600" y="1371600"/>
+            <a:ext cx="1911096" cy="713232"/>
           </a:xfrm>
           <a:prstGeom prst="roundRect">
             <a:avLst>
@@ -31422,8 +31422,8 @@
         </p:nvSpPr>
         <p:spPr>
           <a:xfrm>
-            <a:off x="484634" y="1463040"/>
-            <a:ext cx="-182877" cy="365760"/>
+            <a:off x="2587752" y="1371600"/>
+            <a:ext cx="1801368" cy="713232"/>
           </a:xfrm>
           <a:prstGeom prst="rect">
             <a:avLst/>
@@ -31431,7 +31431,7 @@
           <a:noFill/>
         </p:spPr>
         <p:txBody>
-          <a:bodyPr wrap="square" anchor="t" lIns="25400" rIns="25400" tIns="25400" bIns="25400">
+          <a:bodyPr wrap="square" anchor="ctr" lIns="25400" rIns="25400" tIns="25400" bIns="25400">
             <a:spAutoFit/>
           </a:bodyPr>
           <a:lstStyle/>
@@ -31442,7 +31442,7 @@
               </a:spcAft>
             </a:pPr>
             <a:r>
-              <a:rPr sz="1200" b="1">
+              <a:rPr sz="1300" b="1">
                 <a:solidFill>
                   <a:srgbClr val="0B1F2A"/>
                 </a:solidFill>
@@ -31462,8 +31462,8 @@
         </p:nvSpPr>
         <p:spPr>
           <a:xfrm>
-            <a:off x="411484" y="1371600"/>
-            <a:ext cx="-54861" cy="502920"/>
+            <a:off x="4480560" y="1371600"/>
+            <a:ext cx="2414016" cy="713232"/>
           </a:xfrm>
           <a:prstGeom prst="roundRect">
             <a:avLst>
@@ -31508,8 +31508,8 @@
         </p:nvSpPr>
         <p:spPr>
           <a:xfrm>
-            <a:off x="484636" y="1463040"/>
-            <a:ext cx="-182877" cy="365760"/>
+            <a:off x="4553712" y="1371600"/>
+            <a:ext cx="2304288" cy="713232"/>
           </a:xfrm>
           <a:prstGeom prst="rect">
             <a:avLst/>
@@ -31517,7 +31517,7 @@
           <a:noFill/>
         </p:spPr>
         <p:txBody>
-          <a:bodyPr wrap="square" anchor="t" lIns="25400" rIns="25400" tIns="25400" bIns="25400">
+          <a:bodyPr wrap="square" anchor="ctr" lIns="25400" rIns="25400" tIns="25400" bIns="25400">
             <a:spAutoFit/>
           </a:bodyPr>
           <a:lstStyle/>
@@ -31528,7 +31528,7 @@
               </a:spcAft>
             </a:pPr>
             <a:r>
-              <a:rPr sz="1200" b="1">
+              <a:rPr sz="1300" b="1">
                 <a:solidFill>
                   <a:srgbClr val="0B1F2A"/>
                 </a:solidFill>
@@ -31548,8 +31548,8 @@
         </p:nvSpPr>
         <p:spPr>
           <a:xfrm>
-            <a:off x="411486" y="1371600"/>
-            <a:ext cx="-54862" cy="502920"/>
+            <a:off x="6949440" y="1371600"/>
+            <a:ext cx="1042416" cy="713232"/>
           </a:xfrm>
           <a:prstGeom prst="roundRect">
             <a:avLst>
@@ -31594,8 +31594,8 @@
         </p:nvSpPr>
         <p:spPr>
           <a:xfrm>
-            <a:off x="484638" y="1463040"/>
-            <a:ext cx="-182878" cy="365760"/>
+            <a:off x="7022592" y="1371600"/>
+            <a:ext cx="932688" cy="713232"/>
           </a:xfrm>
           <a:prstGeom prst="rect">
             <a:avLst/>
@@ -31603,7 +31603,7 @@
           <a:noFill/>
         </p:spPr>
         <p:txBody>
-          <a:bodyPr wrap="square" anchor="t" lIns="25400" rIns="25400" tIns="25400" bIns="25400">
+          <a:bodyPr wrap="square" anchor="ctr" lIns="25400" rIns="25400" tIns="25400" bIns="25400">
             <a:spAutoFit/>
           </a:bodyPr>
           <a:lstStyle/>
@@ -31614,7 +31614,7 @@
               </a:spcAft>
             </a:pPr>
             <a:r>
-              <a:rPr sz="1200" b="1">
+              <a:rPr sz="1300" b="1">
                 <a:solidFill>
                   <a:srgbClr val="0B1F2A"/>
                 </a:solidFill>
@@ -31634,8 +31634,8 @@
         </p:nvSpPr>
         <p:spPr>
           <a:xfrm>
-            <a:off x="411488" y="1371600"/>
-            <a:ext cx="-54860" cy="502920"/>
+            <a:off x="8046720" y="1371600"/>
+            <a:ext cx="3968496" cy="713232"/>
           </a:xfrm>
           <a:prstGeom prst="roundRect">
             <a:avLst>
@@ -31680,8 +31680,8 @@
         </p:nvSpPr>
         <p:spPr>
           <a:xfrm>
-            <a:off x="484640" y="1463040"/>
-            <a:ext cx="-182876" cy="365760"/>
+            <a:off x="8119872" y="1371600"/>
+            <a:ext cx="3858768" cy="713232"/>
           </a:xfrm>
           <a:prstGeom prst="rect">
             <a:avLst/>
@@ -31689,7 +31689,7 @@
           <a:noFill/>
         </p:spPr>
         <p:txBody>
-          <a:bodyPr wrap="square" anchor="t" lIns="25400" rIns="25400" tIns="25400" bIns="25400">
+          <a:bodyPr wrap="square" anchor="ctr" lIns="25400" rIns="25400" tIns="25400" bIns="25400">
             <a:spAutoFit/>
           </a:bodyPr>
           <a:lstStyle/>
@@ -31700,7 +31700,7 @@
               </a:spcAft>
             </a:pPr>
             <a:r>
-              <a:rPr sz="1200" b="1">
+              <a:rPr sz="1300" b="1">
                 <a:solidFill>
                   <a:srgbClr val="0B1F2A"/>
                 </a:solidFill>
@@ -31720,8 +31720,8 @@
         </p:nvSpPr>
         <p:spPr>
           <a:xfrm>
-            <a:off x="411480" y="1920240"/>
-            <a:ext cx="-54861" cy="749808"/>
+            <a:off x="365760" y="2139696"/>
+            <a:ext cx="2093976" cy="713232"/>
           </a:xfrm>
           <a:prstGeom prst="roundRect">
             <a:avLst>
@@ -31766,8 +31766,8 @@
         </p:nvSpPr>
         <p:spPr>
           <a:xfrm>
-            <a:off x="502920" y="2029968"/>
-            <a:ext cx="-228597" cy="548640"/>
+            <a:off x="457200" y="2139696"/>
+            <a:ext cx="1947672" cy="713232"/>
           </a:xfrm>
           <a:prstGeom prst="rect">
             <a:avLst/>
@@ -31786,7 +31786,7 @@
               </a:spcAft>
             </a:pPr>
             <a:r>
-              <a:rPr sz="1100" b="1">
+              <a:rPr sz="1200" b="1">
                 <a:solidFill>
                   <a:srgbClr val="E8D0A0"/>
                 </a:solidFill>
@@ -31806,8 +31806,8 @@
         </p:nvSpPr>
         <p:spPr>
           <a:xfrm>
-            <a:off x="411482" y="1920240"/>
-            <a:ext cx="-54861" cy="749808"/>
+            <a:off x="2514600" y="2139696"/>
+            <a:ext cx="1911096" cy="713232"/>
           </a:xfrm>
           <a:prstGeom prst="roundRect">
             <a:avLst>
@@ -31852,8 +31852,8 @@
         </p:nvSpPr>
         <p:spPr>
           <a:xfrm>
-            <a:off x="502922" y="2029968"/>
-            <a:ext cx="-228597" cy="548640"/>
+            <a:off x="2606040" y="2139696"/>
+            <a:ext cx="1764792" cy="713232"/>
           </a:xfrm>
           <a:prstGeom prst="rect">
             <a:avLst/>
@@ -31866,13 +31866,13 @@
           </a:bodyPr>
           <a:lstStyle/>
           <a:p>
-            <a:pPr algn="l">
+            <a:pPr algn="ctr">
               <a:spcAft>
                 <a:spcPts val="400"/>
               </a:spcAft>
             </a:pPr>
             <a:r>
-              <a:rPr sz="1100" b="0">
+              <a:rPr sz="1200" b="0">
                 <a:solidFill>
                   <a:srgbClr val="FFFFFF"/>
                 </a:solidFill>
@@ -31892,8 +31892,8 @@
         </p:nvSpPr>
         <p:spPr>
           <a:xfrm>
-            <a:off x="411484" y="1920240"/>
-            <a:ext cx="-54861" cy="749808"/>
+            <a:off x="4480560" y="2139696"/>
+            <a:ext cx="2414016" cy="713232"/>
           </a:xfrm>
           <a:prstGeom prst="roundRect">
             <a:avLst>
@@ -31938,8 +31938,8 @@
         </p:nvSpPr>
         <p:spPr>
           <a:xfrm>
-            <a:off x="502924" y="2029968"/>
-            <a:ext cx="-228597" cy="548640"/>
+            <a:off x="4572000" y="2139696"/>
+            <a:ext cx="2267712" cy="713232"/>
           </a:xfrm>
           <a:prstGeom prst="rect">
             <a:avLst/>
@@ -31952,20 +31952,20 @@
           </a:bodyPr>
           <a:lstStyle/>
           <a:p>
-            <a:pPr algn="l">
+            <a:pPr algn="ctr">
               <a:spcAft>
                 <a:spcPts val="400"/>
               </a:spcAft>
             </a:pPr>
             <a:r>
-              <a:rPr sz="1100" b="0">
+              <a:rPr sz="1200" b="0">
                 <a:solidFill>
                   <a:srgbClr val="FFFFFF"/>
                 </a:solidFill>
                 <a:latin typeface="微软雅黑"/>
                 <a:ea typeface="微软雅黑"/>
               </a:rPr>
-              <a:t>首 3 年免年费 / 第 4 年起 3,000</a:t>
+              <a:t>前3年免年费；第4年起 3,000</a:t>
             </a:r>
           </a:p>
         </p:txBody>
@@ -31978,8 +31978,8 @@
         </p:nvSpPr>
         <p:spPr>
           <a:xfrm>
-            <a:off x="411486" y="1920240"/>
-            <a:ext cx="-54862" cy="749808"/>
+            <a:off x="6949440" y="2139696"/>
+            <a:ext cx="1042416" cy="713232"/>
           </a:xfrm>
           <a:prstGeom prst="roundRect">
             <a:avLst>
@@ -32024,8 +32024,8 @@
         </p:nvSpPr>
         <p:spPr>
           <a:xfrm>
-            <a:off x="502926" y="2029968"/>
-            <a:ext cx="-228598" cy="548640"/>
+            <a:off x="7040880" y="2139696"/>
+            <a:ext cx="896112" cy="713232"/>
           </a:xfrm>
           <a:prstGeom prst="rect">
             <a:avLst/>
@@ -32038,13 +32038,13 @@
           </a:bodyPr>
           <a:lstStyle/>
           <a:p>
-            <a:pPr algn="l">
+            <a:pPr algn="ctr">
               <a:spcAft>
                 <a:spcPts val="400"/>
               </a:spcAft>
             </a:pPr>
             <a:r>
-              <a:rPr sz="1100" b="0">
+              <a:rPr sz="1200" b="0">
                 <a:solidFill>
                   <a:srgbClr val="FFFFFF"/>
                 </a:solidFill>
@@ -32064,8 +32064,8 @@
         </p:nvSpPr>
         <p:spPr>
           <a:xfrm>
-            <a:off x="411488" y="1920240"/>
-            <a:ext cx="-54860" cy="749808"/>
+            <a:off x="8046720" y="2139696"/>
+            <a:ext cx="3968496" cy="713232"/>
           </a:xfrm>
           <a:prstGeom prst="roundRect">
             <a:avLst>
@@ -32110,8 +32110,8 @@
         </p:nvSpPr>
         <p:spPr>
           <a:xfrm>
-            <a:off x="502928" y="2029968"/>
-            <a:ext cx="-228596" cy="548640"/>
+            <a:off x="8138160" y="2139696"/>
+            <a:ext cx="3822192" cy="713232"/>
           </a:xfrm>
           <a:prstGeom prst="rect">
             <a:avLst/>
@@ -32124,13 +32124,13 @@
           </a:bodyPr>
           <a:lstStyle/>
           <a:p>
-            <a:pPr algn="l">
+            <a:pPr algn="ctr">
               <a:spcAft>
                 <a:spcPts val="400"/>
               </a:spcAft>
             </a:pPr>
             <a:r>
-              <a:rPr sz="1100" b="0">
+              <a:rPr sz="1200" b="0">
                 <a:solidFill>
                   <a:srgbClr val="FFFFFF"/>
                 </a:solidFill>
@@ -32150,8 +32150,8 @@
         </p:nvSpPr>
         <p:spPr>
           <a:xfrm>
-            <a:off x="411480" y="2743200"/>
-            <a:ext cx="-54861" cy="749808"/>
+            <a:off x="365760" y="2898648"/>
+            <a:ext cx="2093976" cy="713232"/>
           </a:xfrm>
           <a:prstGeom prst="roundRect">
             <a:avLst>
@@ -32196,8 +32196,8 @@
         </p:nvSpPr>
         <p:spPr>
           <a:xfrm>
-            <a:off x="502920" y="2852928"/>
-            <a:ext cx="-228597" cy="548640"/>
+            <a:off x="457200" y="2898648"/>
+            <a:ext cx="1947672" cy="713232"/>
           </a:xfrm>
           <a:prstGeom prst="rect">
             <a:avLst/>
@@ -32216,7 +32216,7 @@
               </a:spcAft>
             </a:pPr>
             <a:r>
-              <a:rPr sz="1100" b="1">
+              <a:rPr sz="1200" b="1">
                 <a:solidFill>
                   <a:srgbClr val="E8D0A0"/>
                 </a:solidFill>
@@ -32236,8 +32236,8 @@
         </p:nvSpPr>
         <p:spPr>
           <a:xfrm>
-            <a:off x="411482" y="2743200"/>
-            <a:ext cx="-54861" cy="749808"/>
+            <a:off x="2514600" y="2898648"/>
+            <a:ext cx="1911096" cy="713232"/>
           </a:xfrm>
           <a:prstGeom prst="roundRect">
             <a:avLst>
@@ -32282,8 +32282,8 @@
         </p:nvSpPr>
         <p:spPr>
           <a:xfrm>
-            <a:off x="502922" y="2852928"/>
-            <a:ext cx="-228597" cy="548640"/>
+            <a:off x="2606040" y="2898648"/>
+            <a:ext cx="1764792" cy="713232"/>
           </a:xfrm>
           <a:prstGeom prst="rect">
             <a:avLst/>
@@ -32296,13 +32296,13 @@
           </a:bodyPr>
           <a:lstStyle/>
           <a:p>
-            <a:pPr algn="l">
+            <a:pPr algn="ctr">
               <a:spcAft>
                 <a:spcPts val="400"/>
               </a:spcAft>
             </a:pPr>
             <a:r>
-              <a:rPr sz="1100" b="0">
+              <a:rPr sz="1200" b="0">
                 <a:solidFill>
                   <a:srgbClr val="FFFFFF"/>
                 </a:solidFill>
@@ -32322,8 +32322,8 @@
         </p:nvSpPr>
         <p:spPr>
           <a:xfrm>
-            <a:off x="411484" y="2743200"/>
-            <a:ext cx="-54861" cy="749808"/>
+            <a:off x="4480560" y="2898648"/>
+            <a:ext cx="2414016" cy="713232"/>
           </a:xfrm>
           <a:prstGeom prst="roundRect">
             <a:avLst>
@@ -32368,8 +32368,8 @@
         </p:nvSpPr>
         <p:spPr>
           <a:xfrm>
-            <a:off x="502924" y="2852928"/>
-            <a:ext cx="-228597" cy="548640"/>
+            <a:off x="4572000" y="2898648"/>
+            <a:ext cx="2267712" cy="713232"/>
           </a:xfrm>
           <a:prstGeom prst="rect">
             <a:avLst/>
@@ -32382,20 +32382,20 @@
           </a:bodyPr>
           <a:lstStyle/>
           <a:p>
-            <a:pPr algn="l">
+            <a:pPr algn="ctr">
               <a:spcAft>
                 <a:spcPts val="400"/>
               </a:spcAft>
             </a:pPr>
             <a:r>
-              <a:rPr sz="1100" b="0">
+              <a:rPr sz="1200" b="0">
                 <a:solidFill>
                   <a:srgbClr val="FFFFFF"/>
                 </a:solidFill>
                 <a:latin typeface="微软雅黑"/>
                 <a:ea typeface="微软雅黑"/>
               </a:rPr>
-              <a:t>AED 3,000/年</a:t>
+              <a:t>AED 3,000 / 年</a:t>
             </a:r>
           </a:p>
         </p:txBody>
@@ -32408,8 +32408,8 @@
         </p:nvSpPr>
         <p:spPr>
           <a:xfrm>
-            <a:off x="411486" y="2743200"/>
-            <a:ext cx="-54862" cy="749808"/>
+            <a:off x="6949440" y="2898648"/>
+            <a:ext cx="1042416" cy="713232"/>
           </a:xfrm>
           <a:prstGeom prst="roundRect">
             <a:avLst>
@@ -32454,8 +32454,8 @@
         </p:nvSpPr>
         <p:spPr>
           <a:xfrm>
-            <a:off x="502926" y="2852928"/>
-            <a:ext cx="-228598" cy="548640"/>
+            <a:off x="7040880" y="2898648"/>
+            <a:ext cx="896112" cy="713232"/>
           </a:xfrm>
           <a:prstGeom prst="rect">
             <a:avLst/>
@@ -32468,13 +32468,13 @@
           </a:bodyPr>
           <a:lstStyle/>
           <a:p>
-            <a:pPr algn="l">
+            <a:pPr algn="ctr">
               <a:spcAft>
                 <a:spcPts val="400"/>
               </a:spcAft>
             </a:pPr>
             <a:r>
-              <a:rPr sz="1100" b="0">
+              <a:rPr sz="1200" b="0">
                 <a:solidFill>
                   <a:srgbClr val="FFFFFF"/>
                 </a:solidFill>
@@ -32494,8 +32494,8 @@
         </p:nvSpPr>
         <p:spPr>
           <a:xfrm>
-            <a:off x="411488" y="2743200"/>
-            <a:ext cx="-54860" cy="749808"/>
+            <a:off x="8046720" y="2898648"/>
+            <a:ext cx="3968496" cy="713232"/>
           </a:xfrm>
           <a:prstGeom prst="roundRect">
             <a:avLst>
@@ -32540,8 +32540,8 @@
         </p:nvSpPr>
         <p:spPr>
           <a:xfrm>
-            <a:off x="502928" y="2852928"/>
-            <a:ext cx="-228596" cy="548640"/>
+            <a:off x="8138160" y="2898648"/>
+            <a:ext cx="3822192" cy="713232"/>
           </a:xfrm>
           <a:prstGeom prst="rect">
             <a:avLst/>
@@ -32554,13 +32554,13 @@
           </a:bodyPr>
           <a:lstStyle/>
           <a:p>
-            <a:pPr algn="l">
+            <a:pPr algn="ctr">
               <a:spcAft>
                 <a:spcPts val="400"/>
               </a:spcAft>
             </a:pPr>
             <a:r>
-              <a:rPr sz="1100" b="0">
+              <a:rPr sz="1200" b="0">
                 <a:solidFill>
                   <a:srgbClr val="FFFFFF"/>
                 </a:solidFill>
@@ -32580,8 +32580,8 @@
         </p:nvSpPr>
         <p:spPr>
           <a:xfrm>
-            <a:off x="411480" y="3566160"/>
-            <a:ext cx="-54861" cy="749808"/>
+            <a:off x="365760" y="3657600"/>
+            <a:ext cx="2093976" cy="713232"/>
           </a:xfrm>
           <a:prstGeom prst="roundRect">
             <a:avLst>
@@ -32626,8 +32626,8 @@
         </p:nvSpPr>
         <p:spPr>
           <a:xfrm>
-            <a:off x="502920" y="3675888"/>
-            <a:ext cx="-228597" cy="548640"/>
+            <a:off x="457200" y="3657600"/>
+            <a:ext cx="1947672" cy="713232"/>
           </a:xfrm>
           <a:prstGeom prst="rect">
             <a:avLst/>
@@ -32646,7 +32646,7 @@
               </a:spcAft>
             </a:pPr>
             <a:r>
-              <a:rPr sz="1100" b="1">
+              <a:rPr sz="1200" b="1">
                 <a:solidFill>
                   <a:srgbClr val="E8D0A0"/>
                 </a:solidFill>
@@ -32666,8 +32666,8 @@
         </p:nvSpPr>
         <p:spPr>
           <a:xfrm>
-            <a:off x="411482" y="3566160"/>
-            <a:ext cx="-54861" cy="749808"/>
+            <a:off x="2514600" y="3657600"/>
+            <a:ext cx="1911096" cy="713232"/>
           </a:xfrm>
           <a:prstGeom prst="roundRect">
             <a:avLst>
@@ -32712,8 +32712,8 @@
         </p:nvSpPr>
         <p:spPr>
           <a:xfrm>
-            <a:off x="502922" y="3675888"/>
-            <a:ext cx="-228597" cy="548640"/>
+            <a:off x="2606040" y="3657600"/>
+            <a:ext cx="1764792" cy="713232"/>
           </a:xfrm>
           <a:prstGeom prst="rect">
             <a:avLst/>
@@ -32726,13 +32726,13 @@
           </a:bodyPr>
           <a:lstStyle/>
           <a:p>
-            <a:pPr algn="l">
+            <a:pPr algn="ctr">
               <a:spcAft>
                 <a:spcPts val="400"/>
               </a:spcAft>
             </a:pPr>
             <a:r>
-              <a:rPr sz="1100" b="0">
+              <a:rPr sz="1200" b="0">
                 <a:solidFill>
                   <a:srgbClr val="FFFFFF"/>
                 </a:solidFill>
@@ -32752,8 +32752,8 @@
         </p:nvSpPr>
         <p:spPr>
           <a:xfrm>
-            <a:off x="411484" y="3566160"/>
-            <a:ext cx="-54861" cy="749808"/>
+            <a:off x="4480560" y="3657600"/>
+            <a:ext cx="2414016" cy="713232"/>
           </a:xfrm>
           <a:prstGeom prst="roundRect">
             <a:avLst>
@@ -32798,8 +32798,8 @@
         </p:nvSpPr>
         <p:spPr>
           <a:xfrm>
-            <a:off x="502924" y="3675888"/>
-            <a:ext cx="-228597" cy="548640"/>
+            <a:off x="4572000" y="3657600"/>
+            <a:ext cx="2267712" cy="713232"/>
           </a:xfrm>
           <a:prstGeom prst="rect">
             <a:avLst/>
@@ -32812,20 +32812,20 @@
           </a:bodyPr>
           <a:lstStyle/>
           <a:p>
-            <a:pPr algn="l">
+            <a:pPr algn="ctr">
               <a:spcAft>
                 <a:spcPts val="400"/>
               </a:spcAft>
             </a:pPr>
             <a:r>
-              <a:rPr sz="1100" b="0">
+              <a:rPr sz="1200" b="0">
                 <a:solidFill>
                   <a:srgbClr val="FFFFFF"/>
                 </a:solidFill>
                 <a:latin typeface="微软雅黑"/>
                 <a:ea typeface="微软雅黑"/>
               </a:rPr>
-              <a:t>AED 12,000/年</a:t>
+              <a:t>AED 12,000 / 年</a:t>
             </a:r>
           </a:p>
         </p:txBody>
@@ -32838,8 +32838,8 @@
         </p:nvSpPr>
         <p:spPr>
           <a:xfrm>
-            <a:off x="411486" y="3566160"/>
-            <a:ext cx="-54862" cy="749808"/>
+            <a:off x="6949440" y="3657600"/>
+            <a:ext cx="1042416" cy="713232"/>
           </a:xfrm>
           <a:prstGeom prst="roundRect">
             <a:avLst>
@@ -32884,8 +32884,8 @@
         </p:nvSpPr>
         <p:spPr>
           <a:xfrm>
-            <a:off x="502926" y="3675888"/>
-            <a:ext cx="-228598" cy="548640"/>
+            <a:off x="7040880" y="3657600"/>
+            <a:ext cx="896112" cy="713232"/>
           </a:xfrm>
           <a:prstGeom prst="rect">
             <a:avLst/>
@@ -32898,13 +32898,13 @@
           </a:bodyPr>
           <a:lstStyle/>
           <a:p>
-            <a:pPr algn="l">
+            <a:pPr algn="ctr">
               <a:spcAft>
                 <a:spcPts val="400"/>
               </a:spcAft>
             </a:pPr>
             <a:r>
-              <a:rPr sz="1100" b="0">
+              <a:rPr sz="1200" b="0">
                 <a:solidFill>
                   <a:srgbClr val="FFFFFF"/>
                 </a:solidFill>
@@ -32924,8 +32924,8 @@
         </p:nvSpPr>
         <p:spPr>
           <a:xfrm>
-            <a:off x="411488" y="3566160"/>
-            <a:ext cx="-54860" cy="749808"/>
+            <a:off x="8046720" y="3657600"/>
+            <a:ext cx="3968496" cy="713232"/>
           </a:xfrm>
           <a:prstGeom prst="roundRect">
             <a:avLst>
@@ -32970,8 +32970,8 @@
         </p:nvSpPr>
         <p:spPr>
           <a:xfrm>
-            <a:off x="502928" y="3675888"/>
-            <a:ext cx="-228596" cy="548640"/>
+            <a:off x="8138160" y="3657600"/>
+            <a:ext cx="3822192" cy="713232"/>
           </a:xfrm>
           <a:prstGeom prst="rect">
             <a:avLst/>
@@ -32984,20 +32984,20 @@
           </a:bodyPr>
           <a:lstStyle/>
           <a:p>
-            <a:pPr algn="l">
+            <a:pPr algn="ctr">
               <a:spcAft>
                 <a:spcPts val="400"/>
               </a:spcAft>
             </a:pPr>
             <a:r>
-              <a:rPr sz="1100" b="0">
+              <a:rPr sz="1200" b="0">
                 <a:solidFill>
                   <a:srgbClr val="FFFFFF"/>
                 </a:solidFill>
                 <a:latin typeface="微软雅黑"/>
                 <a:ea typeface="微软雅黑"/>
               </a:rPr>
-              <a:t>黄页/招聘/撮合/活动 2 席</a:t>
+              <a:t>黄页 / 招聘 / 撮合 / 活动 2 席</a:t>
             </a:r>
           </a:p>
         </p:txBody>
@@ -33010,8 +33010,8 @@
         </p:nvSpPr>
         <p:spPr>
           <a:xfrm>
-            <a:off x="411480" y="4389120"/>
-            <a:ext cx="-54861" cy="749808"/>
+            <a:off x="365760" y="4416552"/>
+            <a:ext cx="2093976" cy="713232"/>
           </a:xfrm>
           <a:prstGeom prst="roundRect">
             <a:avLst>
@@ -33056,8 +33056,8 @@
         </p:nvSpPr>
         <p:spPr>
           <a:xfrm>
-            <a:off x="502920" y="4498848"/>
-            <a:ext cx="-228597" cy="548640"/>
+            <a:off x="457200" y="4416552"/>
+            <a:ext cx="1947672" cy="713232"/>
           </a:xfrm>
           <a:prstGeom prst="rect">
             <a:avLst/>
@@ -33076,7 +33076,7 @@
               </a:spcAft>
             </a:pPr>
             <a:r>
-              <a:rPr sz="1100" b="1">
+              <a:rPr sz="1200" b="1">
                 <a:solidFill>
                   <a:srgbClr val="E8D0A0"/>
                 </a:solidFill>
@@ -33096,8 +33096,8 @@
         </p:nvSpPr>
         <p:spPr>
           <a:xfrm>
-            <a:off x="411482" y="4389120"/>
-            <a:ext cx="-54861" cy="749808"/>
+            <a:off x="2514600" y="4416552"/>
+            <a:ext cx="1911096" cy="713232"/>
           </a:xfrm>
           <a:prstGeom prst="roundRect">
             <a:avLst>
@@ -33142,8 +33142,8 @@
         </p:nvSpPr>
         <p:spPr>
           <a:xfrm>
-            <a:off x="502922" y="4498848"/>
-            <a:ext cx="-228597" cy="548640"/>
+            <a:off x="2606040" y="4416552"/>
+            <a:ext cx="1764792" cy="713232"/>
           </a:xfrm>
           <a:prstGeom prst="rect">
             <a:avLst/>
@@ -33156,13 +33156,13 @@
           </a:bodyPr>
           <a:lstStyle/>
           <a:p>
-            <a:pPr algn="l">
+            <a:pPr algn="ctr">
               <a:spcAft>
                 <a:spcPts val="400"/>
               </a:spcAft>
             </a:pPr>
             <a:r>
-              <a:rPr sz="1100" b="0">
+              <a:rPr sz="1200" b="0">
                 <a:solidFill>
                   <a:srgbClr val="FFFFFF"/>
                 </a:solidFill>
@@ -33182,8 +33182,8 @@
         </p:nvSpPr>
         <p:spPr>
           <a:xfrm>
-            <a:off x="411484" y="4389120"/>
-            <a:ext cx="-54861" cy="749808"/>
+            <a:off x="4480560" y="4416552"/>
+            <a:ext cx="2414016" cy="713232"/>
           </a:xfrm>
           <a:prstGeom prst="roundRect">
             <a:avLst>
@@ -33228,8 +33228,8 @@
         </p:nvSpPr>
         <p:spPr>
           <a:xfrm>
-            <a:off x="502924" y="4498848"/>
-            <a:ext cx="-228597" cy="548640"/>
+            <a:off x="4572000" y="4416552"/>
+            <a:ext cx="2267712" cy="713232"/>
           </a:xfrm>
           <a:prstGeom prst="rect">
             <a:avLst/>
@@ -33242,20 +33242,20 @@
           </a:bodyPr>
           <a:lstStyle/>
           <a:p>
-            <a:pPr algn="l">
+            <a:pPr algn="ctr">
               <a:spcAft>
                 <a:spcPts val="400"/>
               </a:spcAft>
             </a:pPr>
             <a:r>
-              <a:rPr sz="1100" b="0">
+              <a:rPr sz="1200" b="0">
                 <a:solidFill>
                   <a:srgbClr val="FFFFFF"/>
                 </a:solidFill>
                 <a:latin typeface="微软雅黑"/>
                 <a:ea typeface="微软雅黑"/>
               </a:rPr>
-              <a:t>AED 60,000/年</a:t>
+              <a:t>AED 60,000 / 年</a:t>
             </a:r>
           </a:p>
         </p:txBody>
@@ -33268,8 +33268,8 @@
         </p:nvSpPr>
         <p:spPr>
           <a:xfrm>
-            <a:off x="411486" y="4389120"/>
-            <a:ext cx="-54862" cy="749808"/>
+            <a:off x="6949440" y="4416552"/>
+            <a:ext cx="1042416" cy="713232"/>
           </a:xfrm>
           <a:prstGeom prst="roundRect">
             <a:avLst>
@@ -33314,8 +33314,8 @@
         </p:nvSpPr>
         <p:spPr>
           <a:xfrm>
-            <a:off x="502926" y="4498848"/>
-            <a:ext cx="-228598" cy="548640"/>
+            <a:off x="7040880" y="4416552"/>
+            <a:ext cx="896112" cy="713232"/>
           </a:xfrm>
           <a:prstGeom prst="rect">
             <a:avLst/>
@@ -33328,13 +33328,13 @@
           </a:bodyPr>
           <a:lstStyle/>
           <a:p>
-            <a:pPr algn="l">
+            <a:pPr algn="ctr">
               <a:spcAft>
                 <a:spcPts val="400"/>
               </a:spcAft>
             </a:pPr>
             <a:r>
-              <a:rPr sz="1100" b="0">
+              <a:rPr sz="1200" b="0">
                 <a:solidFill>
                   <a:srgbClr val="FFFFFF"/>
                 </a:solidFill>
@@ -33354,8 +33354,8 @@
         </p:nvSpPr>
         <p:spPr>
           <a:xfrm>
-            <a:off x="411488" y="4389120"/>
-            <a:ext cx="-54860" cy="749808"/>
+            <a:off x="8046720" y="4416552"/>
+            <a:ext cx="3968496" cy="713232"/>
           </a:xfrm>
           <a:prstGeom prst="roundRect">
             <a:avLst>
@@ -33400,8 +33400,8 @@
         </p:nvSpPr>
         <p:spPr>
           <a:xfrm>
-            <a:off x="502928" y="4498848"/>
-            <a:ext cx="-228596" cy="548640"/>
+            <a:off x="8138160" y="4416552"/>
+            <a:ext cx="3822192" cy="713232"/>
           </a:xfrm>
           <a:prstGeom prst="rect">
             <a:avLst/>
@@ -33414,13 +33414,13 @@
           </a:bodyPr>
           <a:lstStyle/>
           <a:p>
-            <a:pPr algn="l">
+            <a:pPr algn="ctr">
               <a:spcAft>
                 <a:spcPts val="400"/>
               </a:spcAft>
             </a:pPr>
             <a:r>
-              <a:rPr sz="1100" b="0">
+              <a:rPr sz="1200" b="0">
                 <a:solidFill>
                   <a:srgbClr val="FFFFFF"/>
                 </a:solidFill>
@@ -33440,8 +33440,8 @@
         </p:nvSpPr>
         <p:spPr>
           <a:xfrm>
-            <a:off x="411480" y="5212080"/>
-            <a:ext cx="-54861" cy="749808"/>
+            <a:off x="365760" y="5175504"/>
+            <a:ext cx="2093976" cy="713232"/>
           </a:xfrm>
           <a:prstGeom prst="roundRect">
             <a:avLst>
@@ -33486,8 +33486,8 @@
         </p:nvSpPr>
         <p:spPr>
           <a:xfrm>
-            <a:off x="502920" y="5321808"/>
-            <a:ext cx="-228597" cy="548640"/>
+            <a:off x="457200" y="5175504"/>
+            <a:ext cx="1947672" cy="713232"/>
           </a:xfrm>
           <a:prstGeom prst="rect">
             <a:avLst/>
@@ -33506,7 +33506,7 @@
               </a:spcAft>
             </a:pPr>
             <a:r>
-              <a:rPr sz="1100" b="1">
+              <a:rPr sz="1200" b="1">
                 <a:solidFill>
                   <a:srgbClr val="E8D0A0"/>
                 </a:solidFill>
@@ -33526,8 +33526,8 @@
         </p:nvSpPr>
         <p:spPr>
           <a:xfrm>
-            <a:off x="411482" y="5212080"/>
-            <a:ext cx="-54861" cy="749808"/>
+            <a:off x="2514600" y="5175504"/>
+            <a:ext cx="1911096" cy="713232"/>
           </a:xfrm>
           <a:prstGeom prst="roundRect">
             <a:avLst>
@@ -33572,8 +33572,8 @@
         </p:nvSpPr>
         <p:spPr>
           <a:xfrm>
-            <a:off x="502922" y="5321808"/>
-            <a:ext cx="-228597" cy="548640"/>
+            <a:off x="2606040" y="5175504"/>
+            <a:ext cx="1764792" cy="713232"/>
           </a:xfrm>
           <a:prstGeom prst="rect">
             <a:avLst/>
@@ -33586,13 +33586,13 @@
           </a:bodyPr>
           <a:lstStyle/>
           <a:p>
-            <a:pPr algn="l">
+            <a:pPr algn="ctr">
               <a:spcAft>
                 <a:spcPts val="400"/>
               </a:spcAft>
             </a:pPr>
             <a:r>
-              <a:rPr sz="1100" b="0">
+              <a:rPr sz="1200" b="0">
                 <a:solidFill>
                   <a:srgbClr val="FFFFFF"/>
                 </a:solidFill>
@@ -33612,8 +33612,8 @@
         </p:nvSpPr>
         <p:spPr>
           <a:xfrm>
-            <a:off x="411484" y="5212080"/>
-            <a:ext cx="-54861" cy="749808"/>
+            <a:off x="4480560" y="5175504"/>
+            <a:ext cx="2414016" cy="713232"/>
           </a:xfrm>
           <a:prstGeom prst="roundRect">
             <a:avLst>
@@ -33658,8 +33658,8 @@
         </p:nvSpPr>
         <p:spPr>
           <a:xfrm>
-            <a:off x="502924" y="5321808"/>
-            <a:ext cx="-228597" cy="548640"/>
+            <a:off x="4572000" y="5175504"/>
+            <a:ext cx="2267712" cy="713232"/>
           </a:xfrm>
           <a:prstGeom prst="rect">
             <a:avLst/>
@@ -33672,20 +33672,20 @@
           </a:bodyPr>
           <a:lstStyle/>
           <a:p>
-            <a:pPr algn="l">
+            <a:pPr algn="ctr">
               <a:spcAft>
                 <a:spcPts val="400"/>
               </a:spcAft>
             </a:pPr>
             <a:r>
-              <a:rPr sz="1100" b="0">
+              <a:rPr sz="1200" b="0">
                 <a:solidFill>
                   <a:srgbClr val="FFFFFF"/>
                 </a:solidFill>
                 <a:latin typeface="微软雅黑"/>
                 <a:ea typeface="微软雅黑"/>
               </a:rPr>
-              <a:t>AED 200,000/年</a:t>
+              <a:t>AED 200,000 / 年</a:t>
             </a:r>
           </a:p>
         </p:txBody>
@@ -33698,8 +33698,8 @@
         </p:nvSpPr>
         <p:spPr>
           <a:xfrm>
-            <a:off x="411486" y="5212080"/>
-            <a:ext cx="-54862" cy="749808"/>
+            <a:off x="6949440" y="5175504"/>
+            <a:ext cx="1042416" cy="713232"/>
           </a:xfrm>
           <a:prstGeom prst="roundRect">
             <a:avLst>
@@ -33744,8 +33744,8 @@
         </p:nvSpPr>
         <p:spPr>
           <a:xfrm>
-            <a:off x="502926" y="5321808"/>
-            <a:ext cx="-228598" cy="548640"/>
+            <a:off x="7040880" y="5175504"/>
+            <a:ext cx="896112" cy="713232"/>
           </a:xfrm>
           <a:prstGeom prst="rect">
             <a:avLst/>
@@ -33758,13 +33758,13 @@
           </a:bodyPr>
           <a:lstStyle/>
           <a:p>
-            <a:pPr algn="l">
+            <a:pPr algn="ctr">
               <a:spcAft>
                 <a:spcPts val="400"/>
               </a:spcAft>
             </a:pPr>
             <a:r>
-              <a:rPr sz="1100" b="0">
+              <a:rPr sz="1200" b="0">
                 <a:solidFill>
                   <a:srgbClr val="FFFFFF"/>
                 </a:solidFill>
@@ -33784,8 +33784,8 @@
         </p:nvSpPr>
         <p:spPr>
           <a:xfrm>
-            <a:off x="411488" y="5212080"/>
-            <a:ext cx="-54860" cy="749808"/>
+            <a:off x="8046720" y="5175504"/>
+            <a:ext cx="3968496" cy="713232"/>
           </a:xfrm>
           <a:prstGeom prst="roundRect">
             <a:avLst>
@@ -33830,8 +33830,8 @@
         </p:nvSpPr>
         <p:spPr>
           <a:xfrm>
-            <a:off x="502928" y="5321808"/>
-            <a:ext cx="-228596" cy="548640"/>
+            <a:off x="8138160" y="5175504"/>
+            <a:ext cx="3822192" cy="713232"/>
           </a:xfrm>
           <a:prstGeom prst="rect">
             <a:avLst/>
@@ -33844,13 +33844,13 @@
           </a:bodyPr>
           <a:lstStyle/>
           <a:p>
-            <a:pPr algn="l">
+            <a:pPr algn="ctr">
               <a:spcAft>
                 <a:spcPts val="400"/>
               </a:spcAft>
             </a:pPr>
             <a:r>
-              <a:rPr sz="1100" b="0">
+              <a:rPr sz="1200" b="0">
                 <a:solidFill>
                   <a:srgbClr val="FFFFFF"/>
                 </a:solidFill>
